--- a/results/presentations/Advanced Data Analytic Techniques.pptx
+++ b/results/presentations/Advanced Data Analytic Techniques.pptx
@@ -4,6 +4,9 @@
   <p:sldMasterIdLst>
     <p:sldMasterId id="2147483648" r:id="rId1"/>
   </p:sldMasterIdLst>
+  <p:notesMasterIdLst>
+    <p:notesMasterId r:id="rId16"/>
+  </p:notesMasterIdLst>
   <p:sldIdLst>
     <p:sldId id="256" r:id="rId2"/>
     <p:sldId id="257" r:id="rId3"/>
@@ -12,23 +15,24 @@
     <p:sldId id="260" r:id="rId6"/>
     <p:sldId id="261" r:id="rId7"/>
     <p:sldId id="268" r:id="rId8"/>
-    <p:sldId id="262" r:id="rId9"/>
-    <p:sldId id="263" r:id="rId10"/>
-    <p:sldId id="264" r:id="rId11"/>
-    <p:sldId id="265" r:id="rId12"/>
-    <p:sldId id="266" r:id="rId13"/>
-    <p:sldId id="267" r:id="rId14"/>
+    <p:sldId id="269" r:id="rId9"/>
+    <p:sldId id="262" r:id="rId10"/>
+    <p:sldId id="263" r:id="rId11"/>
+    <p:sldId id="264" r:id="rId12"/>
+    <p:sldId id="265" r:id="rId13"/>
+    <p:sldId id="266" r:id="rId14"/>
+    <p:sldId id="267" r:id="rId15"/>
   </p:sldIdLst>
   <p:sldSz cx="18288000" cy="10287000"/>
   <p:notesSz cx="6858000" cy="9144000"/>
   <p:embeddedFontLst>
     <p:embeddedFont>
       <p:font typeface="Times New Roman MT" panose="020B0604020202020204" charset="0"/>
-      <p:regular r:id="rId15"/>
+      <p:regular r:id="rId17"/>
     </p:embeddedFont>
     <p:embeddedFont>
       <p:font typeface="Times New Roman MT Bold" panose="020B0604020202020204" charset="0"/>
-      <p:regular r:id="rId16"/>
+      <p:regular r:id="rId18"/>
     </p:embeddedFont>
   </p:embeddedFontLst>
   <p:defaultTextStyle>
@@ -145,6 +149,607 @@
 </p:presentation>
 </file>
 
+<file path=ppt/notesMasters/notesMaster1.xml><?xml version="1.0" encoding="utf-8"?>
+<p:notesMaster xmlns:a="http://schemas.openxmlformats.org/drawingml/2006/main" xmlns:r="http://schemas.openxmlformats.org/officeDocument/2006/relationships" xmlns:p="http://schemas.openxmlformats.org/presentationml/2006/main">
+  <p:cSld>
+    <p:bg>
+      <p:bgRef idx="1001">
+        <a:schemeClr val="bg1"/>
+      </p:bgRef>
+    </p:bg>
+    <p:spTree>
+      <p:nvGrpSpPr>
+        <p:cNvPr id="1" name=""/>
+        <p:cNvGrpSpPr/>
+        <p:nvPr/>
+      </p:nvGrpSpPr>
+      <p:grpSpPr>
+        <a:xfrm>
+          <a:off x="0" y="0"/>
+          <a:ext cx="0" cy="0"/>
+          <a:chOff x="0" y="0"/>
+          <a:chExt cx="0" cy="0"/>
+        </a:xfrm>
+      </p:grpSpPr>
+      <p:sp>
+        <p:nvSpPr>
+          <p:cNvPr id="2" name="Header Placeholder 1"/>
+          <p:cNvSpPr>
+            <a:spLocks noGrp="1"/>
+          </p:cNvSpPr>
+          <p:nvPr>
+            <p:ph type="hdr" sz="quarter"/>
+          </p:nvPr>
+        </p:nvSpPr>
+        <p:spPr>
+          <a:xfrm>
+            <a:off x="0" y="0"/>
+            <a:ext cx="2971800" cy="458788"/>
+          </a:xfrm>
+          <a:prstGeom prst="rect">
+            <a:avLst/>
+          </a:prstGeom>
+        </p:spPr>
+        <p:txBody>
+          <a:bodyPr vert="horz" lIns="91440" tIns="45720" rIns="91440" bIns="45720" rtlCol="0"/>
+          <a:lstStyle>
+            <a:lvl1pPr algn="l">
+              <a:defRPr sz="1200"/>
+            </a:lvl1pPr>
+          </a:lstStyle>
+          <a:p>
+            <a:endParaRPr lang="en-US"/>
+          </a:p>
+        </p:txBody>
+      </p:sp>
+      <p:sp>
+        <p:nvSpPr>
+          <p:cNvPr id="3" name="Date Placeholder 2"/>
+          <p:cNvSpPr>
+            <a:spLocks noGrp="1"/>
+          </p:cNvSpPr>
+          <p:nvPr>
+            <p:ph type="dt" idx="1"/>
+          </p:nvPr>
+        </p:nvSpPr>
+        <p:spPr>
+          <a:xfrm>
+            <a:off x="3884613" y="0"/>
+            <a:ext cx="2971800" cy="458788"/>
+          </a:xfrm>
+          <a:prstGeom prst="rect">
+            <a:avLst/>
+          </a:prstGeom>
+        </p:spPr>
+        <p:txBody>
+          <a:bodyPr vert="horz" lIns="91440" tIns="45720" rIns="91440" bIns="45720" rtlCol="0"/>
+          <a:lstStyle>
+            <a:lvl1pPr algn="r">
+              <a:defRPr sz="1200"/>
+            </a:lvl1pPr>
+          </a:lstStyle>
+          <a:p>
+            <a:fld id="{8D2C2511-45A0-4E08-9E8E-9CCD7FFCD63E}" type="datetimeFigureOut">
+              <a:rPr lang="en-US" smtClean="0"/>
+              <a:t>12/15/2025</a:t>
+            </a:fld>
+            <a:endParaRPr lang="en-US"/>
+          </a:p>
+        </p:txBody>
+      </p:sp>
+      <p:sp>
+        <p:nvSpPr>
+          <p:cNvPr id="4" name="Slide Image Placeholder 3"/>
+          <p:cNvSpPr>
+            <a:spLocks noGrp="1" noRot="1" noChangeAspect="1"/>
+          </p:cNvSpPr>
+          <p:nvPr>
+            <p:ph type="sldImg" idx="2"/>
+          </p:nvPr>
+        </p:nvSpPr>
+        <p:spPr>
+          <a:xfrm>
+            <a:off x="685800" y="1143000"/>
+            <a:ext cx="5486400" cy="3086100"/>
+          </a:xfrm>
+          <a:prstGeom prst="rect">
+            <a:avLst/>
+          </a:prstGeom>
+          <a:noFill/>
+          <a:ln w="12700">
+            <a:solidFill>
+              <a:prstClr val="black"/>
+            </a:solidFill>
+          </a:ln>
+        </p:spPr>
+        <p:txBody>
+          <a:bodyPr vert="horz" lIns="91440" tIns="45720" rIns="91440" bIns="45720" rtlCol="0" anchor="ctr"/>
+          <a:lstStyle/>
+          <a:p>
+            <a:endParaRPr lang="en-US"/>
+          </a:p>
+        </p:txBody>
+      </p:sp>
+      <p:sp>
+        <p:nvSpPr>
+          <p:cNvPr id="5" name="Notes Placeholder 4"/>
+          <p:cNvSpPr>
+            <a:spLocks noGrp="1"/>
+          </p:cNvSpPr>
+          <p:nvPr>
+            <p:ph type="body" sz="quarter" idx="3"/>
+          </p:nvPr>
+        </p:nvSpPr>
+        <p:spPr>
+          <a:xfrm>
+            <a:off x="685800" y="4400550"/>
+            <a:ext cx="5486400" cy="3600450"/>
+          </a:xfrm>
+          <a:prstGeom prst="rect">
+            <a:avLst/>
+          </a:prstGeom>
+        </p:spPr>
+        <p:txBody>
+          <a:bodyPr vert="horz" lIns="91440" tIns="45720" rIns="91440" bIns="45720" rtlCol="0"/>
+          <a:lstStyle/>
+          <a:p>
+            <a:pPr lvl="0"/>
+            <a:r>
+              <a:rPr lang="en-US"/>
+              <a:t>Click to edit Master text styles</a:t>
+            </a:r>
+          </a:p>
+          <a:p>
+            <a:pPr lvl="1"/>
+            <a:r>
+              <a:rPr lang="en-US"/>
+              <a:t>Second level</a:t>
+            </a:r>
+          </a:p>
+          <a:p>
+            <a:pPr lvl="2"/>
+            <a:r>
+              <a:rPr lang="en-US"/>
+              <a:t>Third level</a:t>
+            </a:r>
+          </a:p>
+          <a:p>
+            <a:pPr lvl="3"/>
+            <a:r>
+              <a:rPr lang="en-US"/>
+              <a:t>Fourth level</a:t>
+            </a:r>
+          </a:p>
+          <a:p>
+            <a:pPr lvl="4"/>
+            <a:r>
+              <a:rPr lang="en-US"/>
+              <a:t>Fifth level</a:t>
+            </a:r>
+          </a:p>
+        </p:txBody>
+      </p:sp>
+      <p:sp>
+        <p:nvSpPr>
+          <p:cNvPr id="6" name="Footer Placeholder 5"/>
+          <p:cNvSpPr>
+            <a:spLocks noGrp="1"/>
+          </p:cNvSpPr>
+          <p:nvPr>
+            <p:ph type="ftr" sz="quarter" idx="4"/>
+          </p:nvPr>
+        </p:nvSpPr>
+        <p:spPr>
+          <a:xfrm>
+            <a:off x="0" y="8685213"/>
+            <a:ext cx="2971800" cy="458787"/>
+          </a:xfrm>
+          <a:prstGeom prst="rect">
+            <a:avLst/>
+          </a:prstGeom>
+        </p:spPr>
+        <p:txBody>
+          <a:bodyPr vert="horz" lIns="91440" tIns="45720" rIns="91440" bIns="45720" rtlCol="0" anchor="b"/>
+          <a:lstStyle>
+            <a:lvl1pPr algn="l">
+              <a:defRPr sz="1200"/>
+            </a:lvl1pPr>
+          </a:lstStyle>
+          <a:p>
+            <a:endParaRPr lang="en-US"/>
+          </a:p>
+        </p:txBody>
+      </p:sp>
+      <p:sp>
+        <p:nvSpPr>
+          <p:cNvPr id="7" name="Slide Number Placeholder 6"/>
+          <p:cNvSpPr>
+            <a:spLocks noGrp="1"/>
+          </p:cNvSpPr>
+          <p:nvPr>
+            <p:ph type="sldNum" sz="quarter" idx="5"/>
+          </p:nvPr>
+        </p:nvSpPr>
+        <p:spPr>
+          <a:xfrm>
+            <a:off x="3884613" y="8685213"/>
+            <a:ext cx="2971800" cy="458787"/>
+          </a:xfrm>
+          <a:prstGeom prst="rect">
+            <a:avLst/>
+          </a:prstGeom>
+        </p:spPr>
+        <p:txBody>
+          <a:bodyPr vert="horz" lIns="91440" tIns="45720" rIns="91440" bIns="45720" rtlCol="0" anchor="b"/>
+          <a:lstStyle>
+            <a:lvl1pPr algn="r">
+              <a:defRPr sz="1200"/>
+            </a:lvl1pPr>
+          </a:lstStyle>
+          <a:p>
+            <a:fld id="{5999BFD2-2D4F-4E62-AAF1-616046896A9F}" type="slidenum">
+              <a:rPr lang="en-US" smtClean="0"/>
+              <a:t>‹#›</a:t>
+            </a:fld>
+            <a:endParaRPr lang="en-US"/>
+          </a:p>
+        </p:txBody>
+      </p:sp>
+    </p:spTree>
+    <p:extLst>
+      <p:ext uri="{BB962C8B-B14F-4D97-AF65-F5344CB8AC3E}">
+        <p14:creationId xmlns:p14="http://schemas.microsoft.com/office/powerpoint/2010/main" val="1845816541"/>
+      </p:ext>
+    </p:extLst>
+  </p:cSld>
+  <p:clrMap bg1="lt1" tx1="dk1" bg2="lt2" tx2="dk2" accent1="accent1" accent2="accent2" accent3="accent3" accent4="accent4" accent5="accent5" accent6="accent6" hlink="hlink" folHlink="folHlink"/>
+  <p:notesStyle>
+    <a:lvl1pPr marL="0" algn="l" defTabSz="914400" rtl="0" eaLnBrk="1" latinLnBrk="0" hangingPunct="1">
+      <a:defRPr sz="1200" kern="1200">
+        <a:solidFill>
+          <a:schemeClr val="tx1"/>
+        </a:solidFill>
+        <a:latin typeface="+mn-lt"/>
+        <a:ea typeface="+mn-ea"/>
+        <a:cs typeface="+mn-cs"/>
+      </a:defRPr>
+    </a:lvl1pPr>
+    <a:lvl2pPr marL="457200" algn="l" defTabSz="914400" rtl="0" eaLnBrk="1" latinLnBrk="0" hangingPunct="1">
+      <a:defRPr sz="1200" kern="1200">
+        <a:solidFill>
+          <a:schemeClr val="tx1"/>
+        </a:solidFill>
+        <a:latin typeface="+mn-lt"/>
+        <a:ea typeface="+mn-ea"/>
+        <a:cs typeface="+mn-cs"/>
+      </a:defRPr>
+    </a:lvl2pPr>
+    <a:lvl3pPr marL="914400" algn="l" defTabSz="914400" rtl="0" eaLnBrk="1" latinLnBrk="0" hangingPunct="1">
+      <a:defRPr sz="1200" kern="1200">
+        <a:solidFill>
+          <a:schemeClr val="tx1"/>
+        </a:solidFill>
+        <a:latin typeface="+mn-lt"/>
+        <a:ea typeface="+mn-ea"/>
+        <a:cs typeface="+mn-cs"/>
+      </a:defRPr>
+    </a:lvl3pPr>
+    <a:lvl4pPr marL="1371600" algn="l" defTabSz="914400" rtl="0" eaLnBrk="1" latinLnBrk="0" hangingPunct="1">
+      <a:defRPr sz="1200" kern="1200">
+        <a:solidFill>
+          <a:schemeClr val="tx1"/>
+        </a:solidFill>
+        <a:latin typeface="+mn-lt"/>
+        <a:ea typeface="+mn-ea"/>
+        <a:cs typeface="+mn-cs"/>
+      </a:defRPr>
+    </a:lvl4pPr>
+    <a:lvl5pPr marL="1828800" algn="l" defTabSz="914400" rtl="0" eaLnBrk="1" latinLnBrk="0" hangingPunct="1">
+      <a:defRPr sz="1200" kern="1200">
+        <a:solidFill>
+          <a:schemeClr val="tx1"/>
+        </a:solidFill>
+        <a:latin typeface="+mn-lt"/>
+        <a:ea typeface="+mn-ea"/>
+        <a:cs typeface="+mn-cs"/>
+      </a:defRPr>
+    </a:lvl5pPr>
+    <a:lvl6pPr marL="2286000" algn="l" defTabSz="914400" rtl="0" eaLnBrk="1" latinLnBrk="0" hangingPunct="1">
+      <a:defRPr sz="1200" kern="1200">
+        <a:solidFill>
+          <a:schemeClr val="tx1"/>
+        </a:solidFill>
+        <a:latin typeface="+mn-lt"/>
+        <a:ea typeface="+mn-ea"/>
+        <a:cs typeface="+mn-cs"/>
+      </a:defRPr>
+    </a:lvl6pPr>
+    <a:lvl7pPr marL="2743200" algn="l" defTabSz="914400" rtl="0" eaLnBrk="1" latinLnBrk="0" hangingPunct="1">
+      <a:defRPr sz="1200" kern="1200">
+        <a:solidFill>
+          <a:schemeClr val="tx1"/>
+        </a:solidFill>
+        <a:latin typeface="+mn-lt"/>
+        <a:ea typeface="+mn-ea"/>
+        <a:cs typeface="+mn-cs"/>
+      </a:defRPr>
+    </a:lvl7pPr>
+    <a:lvl8pPr marL="3200400" algn="l" defTabSz="914400" rtl="0" eaLnBrk="1" latinLnBrk="0" hangingPunct="1">
+      <a:defRPr sz="1200" kern="1200">
+        <a:solidFill>
+          <a:schemeClr val="tx1"/>
+        </a:solidFill>
+        <a:latin typeface="+mn-lt"/>
+        <a:ea typeface="+mn-ea"/>
+        <a:cs typeface="+mn-cs"/>
+      </a:defRPr>
+    </a:lvl8pPr>
+    <a:lvl9pPr marL="3657600" algn="l" defTabSz="914400" rtl="0" eaLnBrk="1" latinLnBrk="0" hangingPunct="1">
+      <a:defRPr sz="1200" kern="1200">
+        <a:solidFill>
+          <a:schemeClr val="tx1"/>
+        </a:solidFill>
+        <a:latin typeface="+mn-lt"/>
+        <a:ea typeface="+mn-ea"/>
+        <a:cs typeface="+mn-cs"/>
+      </a:defRPr>
+    </a:lvl9pPr>
+  </p:notesStyle>
+</p:notesMaster>
+</file>
+
+<file path=ppt/notesSlides/notesSlide1.xml><?xml version="1.0" encoding="utf-8"?>
+<p:notes xmlns:a="http://schemas.openxmlformats.org/drawingml/2006/main" xmlns:r="http://schemas.openxmlformats.org/officeDocument/2006/relationships" xmlns:p="http://schemas.openxmlformats.org/presentationml/2006/main">
+  <p:cSld>
+    <p:spTree>
+      <p:nvGrpSpPr>
+        <p:cNvPr id="1" name=""/>
+        <p:cNvGrpSpPr/>
+        <p:nvPr/>
+      </p:nvGrpSpPr>
+      <p:grpSpPr>
+        <a:xfrm>
+          <a:off x="0" y="0"/>
+          <a:ext cx="0" cy="0"/>
+          <a:chOff x="0" y="0"/>
+          <a:chExt cx="0" cy="0"/>
+        </a:xfrm>
+      </p:grpSpPr>
+      <p:sp>
+        <p:nvSpPr>
+          <p:cNvPr id="2" name="Slide Image Placeholder 1"/>
+          <p:cNvSpPr>
+            <a:spLocks noGrp="1" noRot="1" noChangeAspect="1"/>
+          </p:cNvSpPr>
+          <p:nvPr>
+            <p:ph type="sldImg"/>
+          </p:nvPr>
+        </p:nvSpPr>
+        <p:spPr/>
+      </p:sp>
+      <p:sp>
+        <p:nvSpPr>
+          <p:cNvPr id="3" name="Notes Placeholder 2"/>
+          <p:cNvSpPr>
+            <a:spLocks noGrp="1"/>
+          </p:cNvSpPr>
+          <p:nvPr>
+            <p:ph type="body" idx="1"/>
+          </p:nvPr>
+        </p:nvSpPr>
+        <p:spPr/>
+        <p:txBody>
+          <a:bodyPr/>
+          <a:lstStyle/>
+          <a:p>
+            <a:endParaRPr lang="en-US" dirty="0"/>
+          </a:p>
+        </p:txBody>
+      </p:sp>
+      <p:sp>
+        <p:nvSpPr>
+          <p:cNvPr id="4" name="Slide Number Placeholder 3"/>
+          <p:cNvSpPr>
+            <a:spLocks noGrp="1"/>
+          </p:cNvSpPr>
+          <p:nvPr>
+            <p:ph type="sldNum" sz="quarter" idx="5"/>
+          </p:nvPr>
+        </p:nvSpPr>
+        <p:spPr/>
+        <p:txBody>
+          <a:bodyPr/>
+          <a:lstStyle/>
+          <a:p>
+            <a:fld id="{5999BFD2-2D4F-4E62-AAF1-616046896A9F}" type="slidenum">
+              <a:rPr lang="en-US" smtClean="0"/>
+              <a:t>6</a:t>
+            </a:fld>
+            <a:endParaRPr lang="en-US"/>
+          </a:p>
+        </p:txBody>
+      </p:sp>
+    </p:spTree>
+    <p:extLst>
+      <p:ext uri="{BB962C8B-B14F-4D97-AF65-F5344CB8AC3E}">
+        <p14:creationId xmlns:p14="http://schemas.microsoft.com/office/powerpoint/2010/main" val="2276719442"/>
+      </p:ext>
+    </p:extLst>
+  </p:cSld>
+  <p:clrMapOvr>
+    <a:masterClrMapping/>
+  </p:clrMapOvr>
+</p:notes>
+</file>
+
+<file path=ppt/notesSlides/notesSlide2.xml><?xml version="1.0" encoding="utf-8"?>
+<p:notes xmlns:a="http://schemas.openxmlformats.org/drawingml/2006/main" xmlns:r="http://schemas.openxmlformats.org/officeDocument/2006/relationships" xmlns:p="http://schemas.openxmlformats.org/presentationml/2006/main">
+  <p:cSld>
+    <p:spTree>
+      <p:nvGrpSpPr>
+        <p:cNvPr id="1" name=""/>
+        <p:cNvGrpSpPr/>
+        <p:nvPr/>
+      </p:nvGrpSpPr>
+      <p:grpSpPr>
+        <a:xfrm>
+          <a:off x="0" y="0"/>
+          <a:ext cx="0" cy="0"/>
+          <a:chOff x="0" y="0"/>
+          <a:chExt cx="0" cy="0"/>
+        </a:xfrm>
+      </p:grpSpPr>
+      <p:sp>
+        <p:nvSpPr>
+          <p:cNvPr id="2" name="Slide Image Placeholder 1"/>
+          <p:cNvSpPr>
+            <a:spLocks noGrp="1" noRot="1" noChangeAspect="1"/>
+          </p:cNvSpPr>
+          <p:nvPr>
+            <p:ph type="sldImg"/>
+          </p:nvPr>
+        </p:nvSpPr>
+        <p:spPr/>
+      </p:sp>
+      <p:sp>
+        <p:nvSpPr>
+          <p:cNvPr id="3" name="Notes Placeholder 2"/>
+          <p:cNvSpPr>
+            <a:spLocks noGrp="1"/>
+          </p:cNvSpPr>
+          <p:nvPr>
+            <p:ph type="body" idx="1"/>
+          </p:nvPr>
+        </p:nvSpPr>
+        <p:spPr/>
+        <p:txBody>
+          <a:bodyPr/>
+          <a:lstStyle/>
+          <a:p>
+            <a:endParaRPr lang="en-US" dirty="0"/>
+          </a:p>
+        </p:txBody>
+      </p:sp>
+      <p:sp>
+        <p:nvSpPr>
+          <p:cNvPr id="4" name="Slide Number Placeholder 3"/>
+          <p:cNvSpPr>
+            <a:spLocks noGrp="1"/>
+          </p:cNvSpPr>
+          <p:nvPr>
+            <p:ph type="sldNum" sz="quarter" idx="5"/>
+          </p:nvPr>
+        </p:nvSpPr>
+        <p:spPr/>
+        <p:txBody>
+          <a:bodyPr/>
+          <a:lstStyle/>
+          <a:p>
+            <a:fld id="{5999BFD2-2D4F-4E62-AAF1-616046896A9F}" type="slidenum">
+              <a:rPr lang="en-US" smtClean="0"/>
+              <a:t>8</a:t>
+            </a:fld>
+            <a:endParaRPr lang="en-US"/>
+          </a:p>
+        </p:txBody>
+      </p:sp>
+    </p:spTree>
+    <p:extLst>
+      <p:ext uri="{BB962C8B-B14F-4D97-AF65-F5344CB8AC3E}">
+        <p14:creationId xmlns:p14="http://schemas.microsoft.com/office/powerpoint/2010/main" val="4113406225"/>
+      </p:ext>
+    </p:extLst>
+  </p:cSld>
+  <p:clrMapOvr>
+    <a:masterClrMapping/>
+  </p:clrMapOvr>
+</p:notes>
+</file>
+
+<file path=ppt/notesSlides/notesSlide3.xml><?xml version="1.0" encoding="utf-8"?>
+<p:notes xmlns:a="http://schemas.openxmlformats.org/drawingml/2006/main" xmlns:r="http://schemas.openxmlformats.org/officeDocument/2006/relationships" xmlns:p="http://schemas.openxmlformats.org/presentationml/2006/main">
+  <p:cSld>
+    <p:spTree>
+      <p:nvGrpSpPr>
+        <p:cNvPr id="1" name=""/>
+        <p:cNvGrpSpPr/>
+        <p:nvPr/>
+      </p:nvGrpSpPr>
+      <p:grpSpPr>
+        <a:xfrm>
+          <a:off x="0" y="0"/>
+          <a:ext cx="0" cy="0"/>
+          <a:chOff x="0" y="0"/>
+          <a:chExt cx="0" cy="0"/>
+        </a:xfrm>
+      </p:grpSpPr>
+      <p:sp>
+        <p:nvSpPr>
+          <p:cNvPr id="2" name="Slide Image Placeholder 1"/>
+          <p:cNvSpPr>
+            <a:spLocks noGrp="1" noRot="1" noChangeAspect="1"/>
+          </p:cNvSpPr>
+          <p:nvPr>
+            <p:ph type="sldImg"/>
+          </p:nvPr>
+        </p:nvSpPr>
+        <p:spPr/>
+      </p:sp>
+      <p:sp>
+        <p:nvSpPr>
+          <p:cNvPr id="3" name="Notes Placeholder 2"/>
+          <p:cNvSpPr>
+            <a:spLocks noGrp="1"/>
+          </p:cNvSpPr>
+          <p:nvPr>
+            <p:ph type="body" idx="1"/>
+          </p:nvPr>
+        </p:nvSpPr>
+        <p:spPr/>
+        <p:txBody>
+          <a:bodyPr/>
+          <a:lstStyle/>
+          <a:p>
+            <a:endParaRPr lang="en-US" dirty="0"/>
+          </a:p>
+        </p:txBody>
+      </p:sp>
+      <p:sp>
+        <p:nvSpPr>
+          <p:cNvPr id="4" name="Slide Number Placeholder 3"/>
+          <p:cNvSpPr>
+            <a:spLocks noGrp="1"/>
+          </p:cNvSpPr>
+          <p:nvPr>
+            <p:ph type="sldNum" sz="quarter" idx="5"/>
+          </p:nvPr>
+        </p:nvSpPr>
+        <p:spPr/>
+        <p:txBody>
+          <a:bodyPr/>
+          <a:lstStyle/>
+          <a:p>
+            <a:fld id="{5999BFD2-2D4F-4E62-AAF1-616046896A9F}" type="slidenum">
+              <a:rPr lang="en-US" smtClean="0"/>
+              <a:t>10</a:t>
+            </a:fld>
+            <a:endParaRPr lang="en-US"/>
+          </a:p>
+        </p:txBody>
+      </p:sp>
+    </p:spTree>
+    <p:extLst>
+      <p:ext uri="{BB962C8B-B14F-4D97-AF65-F5344CB8AC3E}">
+        <p14:creationId xmlns:p14="http://schemas.microsoft.com/office/powerpoint/2010/main" val="871280550"/>
+      </p:ext>
+    </p:extLst>
+  </p:cSld>
+  <p:clrMapOvr>
+    <a:masterClrMapping/>
+  </p:clrMapOvr>
+</p:notes>
+</file>
+
 <file path=ppt/slideLayouts/slideLayout1.xml><?xml version="1.0" encoding="utf-8"?>
 <p:sldLayout xmlns:a="http://schemas.openxmlformats.org/drawingml/2006/main" xmlns:r="http://schemas.openxmlformats.org/officeDocument/2006/relationships" xmlns:p="http://schemas.openxmlformats.org/presentationml/2006/main" type="title" preserve="1">
   <p:cSld name="Title Slide">
@@ -325,7 +930,7 @@
             <a:fld id="{1D8BD707-D9CF-40AE-B4C6-C98DA3205C09}" type="datetimeFigureOut">
               <a:rPr lang="en-US" smtClean="0"/>
               <a:pPr/>
-              <a:t>12/10/2025</a:t>
+              <a:t>12/15/2025</a:t>
             </a:fld>
             <a:endParaRPr lang="en-US"/>
           </a:p>
@@ -490,7 +1095,7 @@
             <a:fld id="{1D8BD707-D9CF-40AE-B4C6-C98DA3205C09}" type="datetimeFigureOut">
               <a:rPr lang="en-US" smtClean="0"/>
               <a:pPr/>
-              <a:t>12/10/2025</a:t>
+              <a:t>12/15/2025</a:t>
             </a:fld>
             <a:endParaRPr lang="en-US"/>
           </a:p>
@@ -665,7 +1270,7 @@
             <a:fld id="{1D8BD707-D9CF-40AE-B4C6-C98DA3205C09}" type="datetimeFigureOut">
               <a:rPr lang="en-US" smtClean="0"/>
               <a:pPr/>
-              <a:t>12/10/2025</a:t>
+              <a:t>12/15/2025</a:t>
             </a:fld>
             <a:endParaRPr lang="en-US"/>
           </a:p>
@@ -830,7 +1435,7 @@
             <a:fld id="{1D8BD707-D9CF-40AE-B4C6-C98DA3205C09}" type="datetimeFigureOut">
               <a:rPr lang="en-US" smtClean="0"/>
               <a:pPr/>
-              <a:t>12/10/2025</a:t>
+              <a:t>12/15/2025</a:t>
             </a:fld>
             <a:endParaRPr lang="en-US"/>
           </a:p>
@@ -1072,7 +1677,7 @@
             <a:fld id="{1D8BD707-D9CF-40AE-B4C6-C98DA3205C09}" type="datetimeFigureOut">
               <a:rPr lang="en-US" smtClean="0"/>
               <a:pPr/>
-              <a:t>12/10/2025</a:t>
+              <a:t>12/15/2025</a:t>
             </a:fld>
             <a:endParaRPr lang="en-US"/>
           </a:p>
@@ -1354,7 +1959,7 @@
             <a:fld id="{1D8BD707-D9CF-40AE-B4C6-C98DA3205C09}" type="datetimeFigureOut">
               <a:rPr lang="en-US" smtClean="0"/>
               <a:pPr/>
-              <a:t>12/10/2025</a:t>
+              <a:t>12/15/2025</a:t>
             </a:fld>
             <a:endParaRPr lang="en-US"/>
           </a:p>
@@ -1770,7 +2375,7 @@
             <a:fld id="{1D8BD707-D9CF-40AE-B4C6-C98DA3205C09}" type="datetimeFigureOut">
               <a:rPr lang="en-US" smtClean="0"/>
               <a:pPr/>
-              <a:t>12/10/2025</a:t>
+              <a:t>12/15/2025</a:t>
             </a:fld>
             <a:endParaRPr lang="en-US"/>
           </a:p>
@@ -1884,7 +2489,7 @@
             <a:fld id="{1D8BD707-D9CF-40AE-B4C6-C98DA3205C09}" type="datetimeFigureOut">
               <a:rPr lang="en-US" smtClean="0"/>
               <a:pPr/>
-              <a:t>12/10/2025</a:t>
+              <a:t>12/15/2025</a:t>
             </a:fld>
             <a:endParaRPr lang="en-US"/>
           </a:p>
@@ -1976,7 +2581,7 @@
             <a:fld id="{1D8BD707-D9CF-40AE-B4C6-C98DA3205C09}" type="datetimeFigureOut">
               <a:rPr lang="en-US" smtClean="0"/>
               <a:pPr/>
-              <a:t>12/10/2025</a:t>
+              <a:t>12/15/2025</a:t>
             </a:fld>
             <a:endParaRPr lang="en-US"/>
           </a:p>
@@ -2248,7 +2853,7 @@
             <a:fld id="{1D8BD707-D9CF-40AE-B4C6-C98DA3205C09}" type="datetimeFigureOut">
               <a:rPr lang="en-US" smtClean="0"/>
               <a:pPr/>
-              <a:t>12/10/2025</a:t>
+              <a:t>12/15/2025</a:t>
             </a:fld>
             <a:endParaRPr lang="en-US"/>
           </a:p>
@@ -2497,7 +3102,7 @@
             <a:fld id="{1D8BD707-D9CF-40AE-B4C6-C98DA3205C09}" type="datetimeFigureOut">
               <a:rPr lang="en-US" smtClean="0"/>
               <a:pPr/>
-              <a:t>12/10/2025</a:t>
+              <a:t>12/15/2025</a:t>
             </a:fld>
             <a:endParaRPr lang="en-US"/>
           </a:p>
@@ -2705,7 +3310,7 @@
             <a:fld id="{1D8BD707-D9CF-40AE-B4C6-C98DA3205C09}" type="datetimeFigureOut">
               <a:rPr lang="en-US" smtClean="0"/>
               <a:pPr/>
-              <a:t>12/10/2025</a:t>
+              <a:t>12/15/2025</a:t>
             </a:fld>
             <a:endParaRPr lang="en-US"/>
           </a:p>
@@ -3691,10 +4296,10 @@
             </a:pathLst>
           </a:custGeom>
           <a:blipFill>
-            <a:blip r:embed="rId2">
+            <a:blip r:embed="rId3">
               <a:extLst>
                 <a:ext uri="{96DAC541-7B7A-43D3-8B79-37D633B846F1}">
-                  <asvg:svgBlip xmlns:asvg="http://schemas.microsoft.com/office/drawing/2016/SVG/main" r:embed="rId3"/>
+                  <asvg:svgBlip xmlns:asvg="http://schemas.microsoft.com/office/drawing/2016/SVG/main" r:embed="rId4"/>
                 </a:ext>
               </a:extLst>
             </a:blip>
@@ -3719,7 +4324,7 @@
         </p:nvSpPr>
         <p:spPr>
           <a:xfrm flipV="1">
-            <a:off x="1028700" y="9248775"/>
+            <a:off x="1028700" y="9621574"/>
             <a:ext cx="16139196" cy="9525"/>
           </a:xfrm>
           <a:prstGeom prst="line">
@@ -3750,8 +4355,8 @@
         </p:nvSpPr>
         <p:spPr>
           <a:xfrm>
-            <a:off x="3662696" y="6205913"/>
-            <a:ext cx="8371099" cy="2941460"/>
+            <a:off x="14295449" y="5510401"/>
+            <a:ext cx="3674745" cy="2953825"/>
           </a:xfrm>
           <a:custGeom>
             <a:avLst/>
@@ -3760,18 +4365,18 @@
             <a:cxnLst/>
             <a:rect l="l" t="t" r="r" b="b"/>
             <a:pathLst>
-              <a:path w="8371099" h="2941460">
+              <a:path w="3674745" h="2953825">
                 <a:moveTo>
                   <a:pt x="0" y="0"/>
                 </a:moveTo>
                 <a:lnTo>
-                  <a:pt x="8371099" y="0"/>
+                  <a:pt x="3674745" y="0"/>
                 </a:lnTo>
                 <a:lnTo>
-                  <a:pt x="8371099" y="2941460"/>
+                  <a:pt x="3674745" y="2953824"/>
                 </a:lnTo>
                 <a:lnTo>
-                  <a:pt x="0" y="2941460"/>
+                  <a:pt x="0" y="2953824"/>
                 </a:lnTo>
                 <a:lnTo>
                   <a:pt x="0" y="0"/>
@@ -3781,9 +4386,9 @@
             </a:pathLst>
           </a:custGeom>
           <a:blipFill>
-            <a:blip r:embed="rId4"/>
+            <a:blip r:embed="rId5"/>
             <a:stretch>
-              <a:fillRect r="-45494"/>
+              <a:fillRect l="-20478" r="-4181"/>
             </a:stretch>
           </a:blipFill>
         </p:spPr>
@@ -3797,13 +4402,66 @@
       </p:sp>
       <p:sp>
         <p:nvSpPr>
-          <p:cNvPr id="8" name="TextBox 8"/>
+          <p:cNvPr id="8" name="Freeform 8"/>
+          <p:cNvSpPr/>
+          <p:nvPr/>
+        </p:nvSpPr>
+        <p:spPr>
+          <a:xfrm>
+            <a:off x="14295449" y="2125276"/>
+            <a:ext cx="3674745" cy="3018224"/>
+          </a:xfrm>
+          <a:custGeom>
+            <a:avLst/>
+            <a:gdLst/>
+            <a:ahLst/>
+            <a:cxnLst/>
+            <a:rect l="l" t="t" r="r" b="b"/>
+            <a:pathLst>
+              <a:path w="3674745" h="3018224">
+                <a:moveTo>
+                  <a:pt x="0" y="0"/>
+                </a:moveTo>
+                <a:lnTo>
+                  <a:pt x="3674745" y="0"/>
+                </a:lnTo>
+                <a:lnTo>
+                  <a:pt x="3674745" y="3018224"/>
+                </a:lnTo>
+                <a:lnTo>
+                  <a:pt x="0" y="3018224"/>
+                </a:lnTo>
+                <a:lnTo>
+                  <a:pt x="0" y="0"/>
+                </a:lnTo>
+                <a:close/>
+              </a:path>
+            </a:pathLst>
+          </a:custGeom>
+          <a:blipFill>
+            <a:blip r:embed="rId6"/>
+            <a:stretch>
+              <a:fillRect l="-20243" r="-4001"/>
+            </a:stretch>
+          </a:blipFill>
+        </p:spPr>
+        <p:txBody>
+          <a:bodyPr/>
+          <a:lstStyle/>
+          <a:p>
+            <a:endParaRPr lang="en-US"/>
+          </a:p>
+        </p:txBody>
+      </p:sp>
+      <p:sp>
+        <p:nvSpPr>
+          <p:cNvPr id="9" name="TextBox 9"/>
           <p:cNvSpPr txBox="1"/>
           <p:nvPr/>
         </p:nvSpPr>
         <p:spPr>
           <a:xfrm>
-            <a:off x="1028700" y="1261605"/>
+            <a:off x="1028700" y="1160475"/>
             <a:ext cx="12953291" cy="847767"/>
           </a:xfrm>
           <a:prstGeom prst="rect">
@@ -3834,21 +4492,21 @@
                 <a:cs typeface="Times New Roman MT Bold"/>
                 <a:sym typeface="Times New Roman MT Bold"/>
               </a:rPr>
-              <a:t>Data Balancing &amp; Feature Scaling</a:t>
-            </a:r>
-          </a:p>
-        </p:txBody>
-      </p:sp>
-      <p:sp>
-        <p:nvSpPr>
-          <p:cNvPr id="9" name="TextBox 9"/>
+              <a:t>Embeddings &amp; Data Splitting</a:t>
+            </a:r>
+          </a:p>
+        </p:txBody>
+      </p:sp>
+      <p:sp>
+        <p:nvSpPr>
+          <p:cNvPr id="10" name="TextBox 10"/>
           <p:cNvSpPr txBox="1"/>
           <p:nvPr/>
         </p:nvSpPr>
         <p:spPr>
           <a:xfrm>
-            <a:off x="857723" y="2262592"/>
-            <a:ext cx="16401577" cy="3813257"/>
+            <a:off x="857723" y="1972876"/>
+            <a:ext cx="13437726" cy="4960204"/>
           </a:xfrm>
           <a:prstGeom prst="rect">
             <a:avLst/>
@@ -3860,13 +4518,100 @@
           </a:bodyPr>
           <a:lstStyle/>
           <a:p>
+            <a:pPr marL="571500" indent="-571500" algn="l">
+              <a:lnSpc>
+                <a:spcPts val="4911"/>
+              </a:lnSpc>
+              <a:buFont typeface="Arial" panose="020B0604020202020204" pitchFamily="34" charset="0"/>
+              <a:buChar char="•"/>
+            </a:pPr>
+            <a:r>
+              <a:rPr lang="en-GB" sz="3559" u="none" strike="noStrike" dirty="0">
+                <a:solidFill>
+                  <a:srgbClr val="FFFCF4"/>
+                </a:solidFill>
+                <a:latin typeface="Times New Roman MT" panose="020B0604020202020204" charset="0"/>
+                <a:ea typeface="Times New Roman MT Bold"/>
+                <a:cs typeface="Times New Roman MT Bold"/>
+                <a:sym typeface="Times New Roman MT Bold"/>
+              </a:rPr>
+              <a:t>Text is represented using lexical features extracted by Term Frequency–Inverse Document Frequency </a:t>
+            </a:r>
+            <a:r>
+              <a:rPr lang="en-GB" sz="3559" b="1" u="none" strike="noStrike" dirty="0">
+                <a:solidFill>
+                  <a:srgbClr val="FFFCF4"/>
+                </a:solidFill>
+                <a:latin typeface="Times New Roman MT" panose="020B0604020202020204" charset="0"/>
+                <a:ea typeface="Times New Roman MT Bold"/>
+                <a:cs typeface="Times New Roman MT Bold"/>
+                <a:sym typeface="Times New Roman MT Bold"/>
+              </a:rPr>
+              <a:t>(TF-IDF) </a:t>
+            </a:r>
+            <a:r>
+              <a:rPr lang="en-GB" sz="3559" u="none" strike="noStrike" dirty="0">
+                <a:solidFill>
+                  <a:srgbClr val="FFFCF4"/>
+                </a:solidFill>
+                <a:latin typeface="Times New Roman MT" panose="020B0604020202020204" charset="0"/>
+                <a:ea typeface="Times New Roman MT Bold"/>
+                <a:cs typeface="Times New Roman MT Bold"/>
+                <a:sym typeface="Times New Roman MT Bold"/>
+              </a:rPr>
+              <a:t>and semantic features using (</a:t>
+            </a:r>
+            <a:r>
+              <a:rPr lang="en-GB" sz="3559" b="1" u="none" strike="noStrike" dirty="0">
+                <a:solidFill>
+                  <a:srgbClr val="FFFCF4"/>
+                </a:solidFill>
+                <a:latin typeface="Times New Roman MT" panose="020B0604020202020204" charset="0"/>
+                <a:ea typeface="Times New Roman MT Bold"/>
+                <a:cs typeface="Times New Roman MT Bold"/>
+                <a:sym typeface="Times New Roman MT Bold"/>
+              </a:rPr>
+              <a:t>BERT</a:t>
+            </a:r>
+            <a:r>
+              <a:rPr lang="en-GB" sz="3559" u="none" strike="noStrike" dirty="0">
+                <a:solidFill>
+                  <a:srgbClr val="FFFCF4"/>
+                </a:solidFill>
+                <a:latin typeface="Times New Roman MT" panose="020B0604020202020204" charset="0"/>
+                <a:ea typeface="Times New Roman MT Bold"/>
+                <a:cs typeface="Times New Roman MT Bold"/>
+                <a:sym typeface="Times New Roman MT Bold"/>
+              </a:rPr>
+              <a:t> embeddings) before feeding into the model.</a:t>
+            </a:r>
+          </a:p>
+          <a:p>
+            <a:pPr marL="571500" indent="-571500" algn="l">
+              <a:lnSpc>
+                <a:spcPts val="4911"/>
+              </a:lnSpc>
+              <a:buFont typeface="Arial" panose="020B0604020202020204" pitchFamily="34" charset="0"/>
+              <a:buChar char="•"/>
+            </a:pPr>
+            <a:endParaRPr lang="en-US" sz="3559" b="1" u="none" strike="noStrike" dirty="0">
+              <a:solidFill>
+                <a:srgbClr val="FFFCF4"/>
+              </a:solidFill>
+              <a:latin typeface="Times New Roman MT Bold"/>
+              <a:ea typeface="Times New Roman MT Bold"/>
+              <a:cs typeface="Times New Roman MT Bold"/>
+              <a:sym typeface="Times New Roman MT Bold"/>
+            </a:endParaRPr>
+          </a:p>
+          <a:p>
             <a:pPr algn="l">
               <a:lnSpc>
-                <a:spcPts val="5187"/>
+                <a:spcPts val="4911"/>
               </a:lnSpc>
             </a:pPr>
             <a:r>
-              <a:rPr lang="en-US" sz="3759" b="1">
+              <a:rPr lang="en-US" sz="3559" b="1" u="none" strike="noStrike" dirty="0">
                 <a:solidFill>
                   <a:srgbClr val="FFFCF4"/>
                 </a:solidFill>
@@ -3875,19 +4620,10 @@
                 <a:cs typeface="Times New Roman MT Bold"/>
                 <a:sym typeface="Times New Roman MT Bold"/>
               </a:rPr>
-              <a:t>SMOTE:</a:t>
-            </a:r>
-          </a:p>
-          <a:p>
-            <a:pPr marL="768469" lvl="1" indent="-384234" algn="l">
-              <a:lnSpc>
-                <a:spcPts val="4911"/>
-              </a:lnSpc>
-              <a:buFont typeface="Arial"/>
-              <a:buChar char="•"/>
-            </a:pPr>
-            <a:r>
-              <a:rPr lang="en-US" sz="3559">
+              <a:t>Data Splitting </a:t>
+            </a:r>
+            <a:r>
+              <a:rPr lang="en-US" sz="3559" u="none" strike="noStrike" dirty="0">
                 <a:solidFill>
                   <a:srgbClr val="FFFCF4"/>
                 </a:solidFill>
@@ -3896,38 +4632,7 @@
                 <a:cs typeface="Times New Roman MT"/>
                 <a:sym typeface="Times New Roman MT"/>
               </a:rPr>
-              <a:t>Balanced the dataset by generating synthetic samples for the minority (human-written) class to prevent</a:t>
-            </a:r>
-            <a:r>
-              <a:rPr lang="en-US" sz="3559" u="none" strike="noStrike">
-                <a:solidFill>
-                  <a:srgbClr val="FFFCF4"/>
-                </a:solidFill>
-                <a:latin typeface="Times New Roman MT"/>
-                <a:ea typeface="Times New Roman MT"/>
-                <a:cs typeface="Times New Roman MT"/>
-                <a:sym typeface="Times New Roman MT"/>
-              </a:rPr>
-              <a:t> model bias.</a:t>
-            </a:r>
-          </a:p>
-          <a:p>
-            <a:pPr algn="l">
-              <a:lnSpc>
-                <a:spcPts val="5187"/>
-              </a:lnSpc>
-            </a:pPr>
-            <a:r>
-              <a:rPr lang="en-US" sz="3759" b="1" u="none" strike="noStrike">
-                <a:solidFill>
-                  <a:srgbClr val="FFFCF4"/>
-                </a:solidFill>
-                <a:latin typeface="Times New Roman MT Bold"/>
-                <a:ea typeface="Times New Roman MT Bold"/>
-                <a:cs typeface="Times New Roman MT Bold"/>
-                <a:sym typeface="Times New Roman MT Bold"/>
-              </a:rPr>
-              <a:t>StandardScaler:</a:t>
+              <a:t>(70 / 15 / 15 : Train / Validation / Test)</a:t>
             </a:r>
           </a:p>
           <a:p>
@@ -3939,19 +4644,7 @@
               <a:buChar char="•"/>
             </a:pPr>
             <a:r>
-              <a:rPr lang="en-US" sz="3459" b="1" u="none" strike="noStrike">
-                <a:solidFill>
-                  <a:srgbClr val="FFFCF4"/>
-                </a:solidFill>
-                <a:latin typeface="Times New Roman MT Bold"/>
-                <a:ea typeface="Times New Roman MT Bold"/>
-                <a:cs typeface="Times New Roman MT Bold"/>
-                <a:sym typeface="Times New Roman MT Bold"/>
-              </a:rPr>
-              <a:t> </a:t>
-            </a:r>
-            <a:r>
-              <a:rPr lang="en-US" sz="3459" u="none" strike="noStrike">
+              <a:rPr lang="en-US" sz="3459" u="none" strike="noStrike" dirty="0">
                 <a:solidFill>
                   <a:srgbClr val="FFFCF4"/>
                 </a:solidFill>
@@ -3960,14 +4653,35 @@
                 <a:cs typeface="Times New Roman MT"/>
                 <a:sym typeface="Times New Roman MT"/>
               </a:rPr>
-              <a:t>Normalized numerical features (zero mean, unit variance) to improve model convergence and performance consistency.</a:t>
-            </a:r>
-          </a:p>
-        </p:txBody>
-      </p:sp>
-      <p:sp>
-        <p:nvSpPr>
-          <p:cNvPr id="10" name="AutoShape 10"/>
+              <a:t>Ensures fair model evaluation and prevents data leakage.</a:t>
+            </a:r>
+          </a:p>
+          <a:p>
+            <a:pPr marL="746879" lvl="1" indent="-373440" algn="l">
+              <a:lnSpc>
+                <a:spcPts val="4773"/>
+              </a:lnSpc>
+              <a:buFont typeface="Arial"/>
+              <a:buChar char="•"/>
+            </a:pPr>
+            <a:r>
+              <a:rPr lang="en-US" sz="3459" u="none" strike="noStrike" dirty="0">
+                <a:solidFill>
+                  <a:srgbClr val="FFFCF4"/>
+                </a:solidFill>
+                <a:latin typeface="Times New Roman MT"/>
+                <a:ea typeface="Times New Roman MT"/>
+                <a:cs typeface="Times New Roman MT"/>
+                <a:sym typeface="Times New Roman MT"/>
+              </a:rPr>
+              <a:t> Training used for fitting, validation for tuning, and test for final performance check.</a:t>
+            </a:r>
+          </a:p>
+        </p:txBody>
+      </p:sp>
+      <p:sp>
+        <p:nvSpPr>
+          <p:cNvPr id="11" name="AutoShape 11"/>
           <p:cNvSpPr/>
           <p:nvPr/>
         </p:nvSpPr>
@@ -4196,6 +4910,348 @@
       </p:sp>
       <p:sp>
         <p:nvSpPr>
+          <p:cNvPr id="6" name="AutoShape 6"/>
+          <p:cNvSpPr/>
+          <p:nvPr/>
+        </p:nvSpPr>
+        <p:spPr>
+          <a:xfrm flipV="1">
+            <a:off x="1028700" y="9248775"/>
+            <a:ext cx="16139196" cy="9525"/>
+          </a:xfrm>
+          <a:prstGeom prst="line">
+            <a:avLst/>
+          </a:prstGeom>
+          <a:ln w="66675" cap="flat">
+            <a:solidFill>
+              <a:srgbClr val="FFFCF4"/>
+            </a:solidFill>
+            <a:prstDash val="solid"/>
+            <a:headEnd type="none" w="sm" len="sm"/>
+            <a:tailEnd type="none" w="sm" len="sm"/>
+          </a:ln>
+        </p:spPr>
+        <p:txBody>
+          <a:bodyPr/>
+          <a:lstStyle/>
+          <a:p>
+            <a:endParaRPr lang="en-US"/>
+          </a:p>
+        </p:txBody>
+      </p:sp>
+      <p:sp>
+        <p:nvSpPr>
+          <p:cNvPr id="8" name="TextBox 8"/>
+          <p:cNvSpPr txBox="1"/>
+          <p:nvPr/>
+        </p:nvSpPr>
+        <p:spPr>
+          <a:xfrm>
+            <a:off x="1028700" y="1261605"/>
+            <a:ext cx="12953291" cy="758477"/>
+          </a:xfrm>
+          <a:prstGeom prst="rect">
+            <a:avLst/>
+          </a:prstGeom>
+        </p:spPr>
+        <p:txBody>
+          <a:bodyPr lIns="0" tIns="0" rIns="0" bIns="0" rtlCol="0" anchor="t">
+            <a:spAutoFit/>
+          </a:bodyPr>
+          <a:lstStyle/>
+          <a:p>
+            <a:pPr lvl="0">
+              <a:lnSpc>
+                <a:spcPts val="5999"/>
+              </a:lnSpc>
+              <a:spcBef>
+                <a:spcPct val="0"/>
+              </a:spcBef>
+            </a:pPr>
+            <a:r>
+              <a:rPr lang="en-US" sz="4999" b="1" spc="-149" dirty="0">
+                <a:solidFill>
+                  <a:srgbClr val="FFFCF4"/>
+                </a:solidFill>
+                <a:latin typeface="Times New Roman MT Bold"/>
+                <a:ea typeface="Times New Roman MT Bold"/>
+                <a:cs typeface="Times New Roman MT Bold"/>
+                <a:sym typeface="Times New Roman MT Bold"/>
+              </a:rPr>
+              <a:t>Feature Scaling &amp; Data Balancing</a:t>
+            </a:r>
+          </a:p>
+        </p:txBody>
+      </p:sp>
+      <p:sp>
+        <p:nvSpPr>
+          <p:cNvPr id="9" name="TextBox 9"/>
+          <p:cNvSpPr txBox="1"/>
+          <p:nvPr/>
+        </p:nvSpPr>
+        <p:spPr>
+          <a:xfrm>
+            <a:off x="857723" y="2262592"/>
+            <a:ext cx="16401577" cy="3793603"/>
+          </a:xfrm>
+          <a:prstGeom prst="rect">
+            <a:avLst/>
+          </a:prstGeom>
+        </p:spPr>
+        <p:txBody>
+          <a:bodyPr lIns="0" tIns="0" rIns="0" bIns="0" rtlCol="0" anchor="t">
+            <a:spAutoFit/>
+          </a:bodyPr>
+          <a:lstStyle/>
+          <a:p>
+            <a:pPr>
+              <a:lnSpc>
+                <a:spcPts val="5187"/>
+              </a:lnSpc>
+            </a:pPr>
+            <a:r>
+              <a:rPr lang="en-US" sz="3759" b="1" dirty="0" err="1">
+                <a:solidFill>
+                  <a:srgbClr val="FFFCF4"/>
+                </a:solidFill>
+                <a:latin typeface="Times New Roman MT Bold"/>
+                <a:ea typeface="Times New Roman MT Bold"/>
+                <a:cs typeface="Times New Roman MT Bold"/>
+                <a:sym typeface="Times New Roman MT Bold"/>
+              </a:rPr>
+              <a:t>StandardScaler</a:t>
+            </a:r>
+            <a:r>
+              <a:rPr lang="en-US" sz="3759" b="1" dirty="0">
+                <a:solidFill>
+                  <a:srgbClr val="FFFCF4"/>
+                </a:solidFill>
+                <a:latin typeface="Times New Roman MT Bold"/>
+                <a:ea typeface="Times New Roman MT Bold"/>
+                <a:cs typeface="Times New Roman MT Bold"/>
+                <a:sym typeface="Times New Roman MT Bold"/>
+              </a:rPr>
+              <a:t>:</a:t>
+            </a:r>
+          </a:p>
+          <a:p>
+            <a:pPr marL="746879" lvl="1" indent="-373440">
+              <a:lnSpc>
+                <a:spcPts val="4773"/>
+              </a:lnSpc>
+              <a:buFont typeface="Arial"/>
+              <a:buChar char="•"/>
+            </a:pPr>
+            <a:r>
+              <a:rPr lang="en-US" sz="3459" b="1" dirty="0">
+                <a:solidFill>
+                  <a:srgbClr val="FFFCF4"/>
+                </a:solidFill>
+                <a:latin typeface="Times New Roman MT Bold"/>
+                <a:ea typeface="Times New Roman MT Bold"/>
+                <a:cs typeface="Times New Roman MT Bold"/>
+                <a:sym typeface="Times New Roman MT Bold"/>
+              </a:rPr>
+              <a:t> </a:t>
+            </a:r>
+            <a:r>
+              <a:rPr lang="en-US" sz="3459" dirty="0">
+                <a:solidFill>
+                  <a:srgbClr val="FFFCF4"/>
+                </a:solidFill>
+                <a:latin typeface="Times New Roman MT"/>
+                <a:ea typeface="Times New Roman MT"/>
+                <a:cs typeface="Times New Roman MT"/>
+                <a:sym typeface="Times New Roman MT"/>
+              </a:rPr>
+              <a:t>Normalized numerical features (zero mean, unit variance) to improve model convergence and performance consistency.</a:t>
+            </a:r>
+            <a:endParaRPr lang="en-US" sz="3759" b="1" dirty="0">
+              <a:solidFill>
+                <a:srgbClr val="FFFCF4"/>
+              </a:solidFill>
+              <a:latin typeface="Times New Roman MT Bold"/>
+              <a:ea typeface="Times New Roman MT Bold"/>
+              <a:cs typeface="Times New Roman MT Bold"/>
+              <a:sym typeface="Times New Roman MT Bold"/>
+            </a:endParaRPr>
+          </a:p>
+          <a:p>
+            <a:pPr algn="l">
+              <a:lnSpc>
+                <a:spcPts val="5187"/>
+              </a:lnSpc>
+            </a:pPr>
+            <a:r>
+              <a:rPr lang="en-US" sz="3759" b="1" dirty="0">
+                <a:solidFill>
+                  <a:srgbClr val="FFFCF4"/>
+                </a:solidFill>
+                <a:latin typeface="Times New Roman MT Bold"/>
+                <a:ea typeface="Times New Roman MT Bold"/>
+                <a:cs typeface="Times New Roman MT Bold"/>
+                <a:sym typeface="Times New Roman MT Bold"/>
+              </a:rPr>
+              <a:t>SMOTE:</a:t>
+            </a:r>
+          </a:p>
+          <a:p>
+            <a:pPr marL="768469" lvl="1" indent="-384234" algn="l">
+              <a:lnSpc>
+                <a:spcPts val="4911"/>
+              </a:lnSpc>
+              <a:buFont typeface="Arial"/>
+              <a:buChar char="•"/>
+            </a:pPr>
+            <a:r>
+              <a:rPr lang="en-GB" sz="3559" u="none" strike="noStrike" dirty="0">
+                <a:solidFill>
+                  <a:srgbClr val="FFFCF4"/>
+                </a:solidFill>
+                <a:latin typeface="Times New Roman MT"/>
+                <a:ea typeface="Times New Roman MT"/>
+                <a:cs typeface="Times New Roman MT"/>
+                <a:sym typeface="Times New Roman MT"/>
+              </a:rPr>
+              <a:t>The dataset was balanced by creating synthetic samples for the minority class (human-written) to reduce model bias.</a:t>
+            </a:r>
+            <a:endParaRPr lang="en-US" sz="3559" u="none" strike="noStrike" dirty="0">
+              <a:solidFill>
+                <a:srgbClr val="FFFCF4"/>
+              </a:solidFill>
+              <a:latin typeface="Times New Roman MT"/>
+              <a:ea typeface="Times New Roman MT"/>
+              <a:cs typeface="Times New Roman MT"/>
+              <a:sym typeface="Times New Roman MT"/>
+            </a:endParaRPr>
+          </a:p>
+        </p:txBody>
+      </p:sp>
+      <p:sp>
+        <p:nvSpPr>
+          <p:cNvPr id="10" name="AutoShape 10"/>
+          <p:cNvSpPr/>
+          <p:nvPr/>
+        </p:nvSpPr>
+        <p:spPr>
+          <a:xfrm flipV="1">
+            <a:off x="1028700" y="1019175"/>
+            <a:ext cx="16139196" cy="9525"/>
+          </a:xfrm>
+          <a:prstGeom prst="line">
+            <a:avLst/>
+          </a:prstGeom>
+          <a:ln w="66675" cap="flat">
+            <a:solidFill>
+              <a:srgbClr val="FFFCF4"/>
+            </a:solidFill>
+            <a:prstDash val="solid"/>
+            <a:headEnd type="none" w="sm" len="sm"/>
+            <a:tailEnd type="none" w="sm" len="sm"/>
+          </a:ln>
+        </p:spPr>
+        <p:txBody>
+          <a:bodyPr/>
+          <a:lstStyle/>
+          <a:p>
+            <a:endParaRPr lang="en-US"/>
+          </a:p>
+        </p:txBody>
+      </p:sp>
+    </p:spTree>
+  </p:cSld>
+  <p:clrMapOvr>
+    <a:masterClrMapping/>
+  </p:clrMapOvr>
+</p:sld>
+</file>
+
+<file path=ppt/slides/slide12.xml><?xml version="1.0" encoding="utf-8"?>
+<p:sld xmlns:a="http://schemas.openxmlformats.org/drawingml/2006/main" xmlns:r="http://schemas.openxmlformats.org/officeDocument/2006/relationships" xmlns:p="http://schemas.openxmlformats.org/presentationml/2006/main">
+  <p:cSld>
+    <p:bg>
+      <p:bgPr>
+        <a:solidFill>
+          <a:srgbClr val="435663"/>
+        </a:solidFill>
+        <a:effectLst/>
+      </p:bgPr>
+    </p:bg>
+    <p:spTree>
+      <p:nvGrpSpPr>
+        <p:cNvPr id="1" name=""/>
+        <p:cNvGrpSpPr/>
+        <p:nvPr/>
+      </p:nvGrpSpPr>
+      <p:grpSpPr>
+        <a:xfrm>
+          <a:off x="0" y="0"/>
+          <a:ext cx="0" cy="0"/>
+          <a:chOff x="0" y="0"/>
+          <a:chExt cx="0" cy="0"/>
+        </a:xfrm>
+      </p:grpSpPr>
+      <p:sp>
+        <p:nvSpPr>
+          <p:cNvPr id="5" name="Freeform 5"/>
+          <p:cNvSpPr/>
+          <p:nvPr/>
+        </p:nvSpPr>
+        <p:spPr>
+          <a:xfrm>
+            <a:off x="16245812" y="1303350"/>
+            <a:ext cx="922084" cy="230521"/>
+          </a:xfrm>
+          <a:custGeom>
+            <a:avLst/>
+            <a:gdLst/>
+            <a:ahLst/>
+            <a:cxnLst/>
+            <a:rect l="l" t="t" r="r" b="b"/>
+            <a:pathLst>
+              <a:path w="922084" h="230521">
+                <a:moveTo>
+                  <a:pt x="0" y="0"/>
+                </a:moveTo>
+                <a:lnTo>
+                  <a:pt x="922084" y="0"/>
+                </a:lnTo>
+                <a:lnTo>
+                  <a:pt x="922084" y="230521"/>
+                </a:lnTo>
+                <a:lnTo>
+                  <a:pt x="0" y="230521"/>
+                </a:lnTo>
+                <a:lnTo>
+                  <a:pt x="0" y="0"/>
+                </a:lnTo>
+                <a:close/>
+              </a:path>
+            </a:pathLst>
+          </a:custGeom>
+          <a:blipFill>
+            <a:blip r:embed="rId2">
+              <a:extLst>
+                <a:ext uri="{96DAC541-7B7A-43D3-8B79-37D633B846F1}">
+                  <asvg:svgBlip xmlns:asvg="http://schemas.microsoft.com/office/drawing/2016/SVG/main" r:embed="rId3"/>
+                </a:ext>
+              </a:extLst>
+            </a:blip>
+            <a:stretch>
+              <a:fillRect/>
+            </a:stretch>
+          </a:blipFill>
+        </p:spPr>
+        <p:txBody>
+          <a:bodyPr/>
+          <a:lstStyle/>
+          <a:p>
+            <a:endParaRPr lang="en-US"/>
+          </a:p>
+        </p:txBody>
+      </p:sp>
+      <p:sp>
+        <p:nvSpPr>
           <p:cNvPr id="6" name="Freeform 6"/>
           <p:cNvSpPr/>
           <p:nvPr/>
@@ -4300,7 +5356,7 @@
         <p:spPr>
           <a:xfrm>
             <a:off x="430280" y="1638646"/>
-            <a:ext cx="17857720" cy="3101551"/>
+            <a:ext cx="17857720" cy="3666388"/>
           </a:xfrm>
           <a:prstGeom prst="rect">
             <a:avLst/>
@@ -4320,7 +5376,7 @@
               <a:buChar char="•"/>
             </a:pPr>
             <a:r>
-              <a:rPr lang="en-US" sz="3499">
+              <a:rPr lang="en-US" sz="3499" dirty="0">
                 <a:solidFill>
                   <a:srgbClr val="FFFCF4"/>
                 </a:solidFill>
@@ -4330,6 +5386,84 @@
                 <a:sym typeface="Times New Roman MT"/>
               </a:rPr>
               <a:t>TF-IDF features were more effective for traditional ML models.</a:t>
+            </a:r>
+          </a:p>
+          <a:p>
+            <a:pPr marL="755647" lvl="1" indent="-377824">
+              <a:lnSpc>
+                <a:spcPts val="4829"/>
+              </a:lnSpc>
+              <a:buFont typeface="Arial"/>
+              <a:buChar char="•"/>
+            </a:pPr>
+            <a:r>
+              <a:rPr lang="en-US" sz="3499" dirty="0">
+                <a:solidFill>
+                  <a:srgbClr val="FFFCF4"/>
+                </a:solidFill>
+                <a:latin typeface="Times New Roman MT"/>
+                <a:ea typeface="Times New Roman MT"/>
+                <a:cs typeface="Times New Roman MT"/>
+                <a:sym typeface="Times New Roman MT"/>
+              </a:rPr>
+              <a:t>BERT embeddings worked better for deep models, improving contextual generalization.</a:t>
+            </a:r>
+          </a:p>
+          <a:p>
+            <a:pPr marL="755647" lvl="1" indent="-377824">
+              <a:lnSpc>
+                <a:spcPts val="4829"/>
+              </a:lnSpc>
+              <a:buFont typeface="Arial"/>
+              <a:buChar char="•"/>
+            </a:pPr>
+            <a:r>
+              <a:rPr lang="en-US" sz="3499" dirty="0" err="1">
+                <a:solidFill>
+                  <a:srgbClr val="FFFCF4"/>
+                </a:solidFill>
+                <a:latin typeface="Times New Roman MT"/>
+                <a:ea typeface="Times New Roman MT"/>
+                <a:cs typeface="Times New Roman MT"/>
+                <a:sym typeface="Times New Roman MT"/>
+              </a:rPr>
+              <a:t>XGBoost</a:t>
+            </a:r>
+            <a:r>
+              <a:rPr lang="en-US" sz="3499" dirty="0">
+                <a:solidFill>
+                  <a:srgbClr val="FFFCF4"/>
+                </a:solidFill>
+                <a:latin typeface="Times New Roman MT"/>
+                <a:ea typeface="Times New Roman MT"/>
+                <a:cs typeface="Times New Roman MT"/>
+                <a:sym typeface="Times New Roman MT"/>
+              </a:rPr>
+              <a:t> </a:t>
+            </a:r>
+            <a:r>
+              <a:rPr lang="en-US" sz="3600" dirty="0">
+                <a:solidFill>
+                  <a:srgbClr val="FFFCF4"/>
+                </a:solidFill>
+                <a:latin typeface="Times New Roman MT"/>
+                <a:ea typeface="Times New Roman MT"/>
+                <a:cs typeface="Times New Roman MT"/>
+                <a:sym typeface="Times New Roman MT"/>
+              </a:rPr>
+              <a:t>achieved the best overall performance accuracy 95.1% </a:t>
+            </a:r>
+            <a:r>
+              <a:rPr lang="en-US" sz="3499" dirty="0">
+                <a:solidFill>
+                  <a:srgbClr val="FFFCF4"/>
+                </a:solidFill>
+                <a:latin typeface="Times New Roman MT"/>
+                <a:ea typeface="Times New Roman MT"/>
+                <a:cs typeface="Times New Roman MT"/>
+                <a:sym typeface="Times New Roman MT"/>
+              </a:rPr>
+              <a:t>.</a:t>
             </a:r>
           </a:p>
           <a:p>
@@ -4341,7 +5475,7 @@
               <a:buChar char="•"/>
             </a:pPr>
             <a:r>
-              <a:rPr lang="en-US" sz="3499">
+              <a:rPr lang="en-US" sz="3499" u="none" strike="noStrike" dirty="0">
                 <a:solidFill>
                   <a:srgbClr val="FFFCF4"/>
                 </a:solidFill>
@@ -4350,19 +5484,10 @@
                 <a:cs typeface="Times New Roman MT"/>
                 <a:sym typeface="Times New Roman MT"/>
               </a:rPr>
-              <a:t>XGBoost provided the best balance between accuracy and interpretability.</a:t>
-            </a:r>
-          </a:p>
-          <a:p>
-            <a:pPr marL="755647" lvl="1" indent="-377824" algn="l">
-              <a:lnSpc>
-                <a:spcPts val="4829"/>
-              </a:lnSpc>
-              <a:buFont typeface="Arial"/>
-              <a:buChar char="•"/>
-            </a:pPr>
-            <a:r>
-              <a:rPr lang="en-US" sz="3499">
+              <a:t>The Stylometric analysis validated these results</a:t>
+            </a:r>
+            <a:r>
+              <a:rPr lang="en-US" sz="3499" dirty="0">
                 <a:solidFill>
                   <a:srgbClr val="FFFCF4"/>
                 </a:solidFill>
@@ -4371,19 +5496,17 @@
                 <a:cs typeface="Times New Roman MT"/>
                 <a:sym typeface="Times New Roman MT"/>
               </a:rPr>
-              <a:t>BERT embeddings worked better for deep models, improving contextual generalization.</a:t>
-            </a:r>
-          </a:p>
-          <a:p>
-            <a:pPr marL="755647" lvl="1" indent="-377824" algn="l">
+              <a:t>:</a:t>
+            </a:r>
+          </a:p>
+          <a:p>
+            <a:pPr marL="377823" lvl="1" algn="l">
               <a:lnSpc>
                 <a:spcPts val="4829"/>
               </a:lnSpc>
-              <a:buFont typeface="Arial"/>
-              <a:buChar char="•"/>
             </a:pPr>
             <a:r>
-              <a:rPr lang="en-US" sz="3499" u="none" strike="noStrike">
+              <a:rPr lang="en-US" sz="3499" u="none" strike="noStrike" dirty="0">
                 <a:solidFill>
                   <a:srgbClr val="FFFCF4"/>
                 </a:solidFill>
@@ -4392,7 +5515,7 @@
                 <a:cs typeface="Times New Roman MT"/>
                 <a:sym typeface="Times New Roman MT"/>
               </a:rPr>
-              <a:t>Stylometric analysis validated these results — AI-generated texts were shorter, more redundant, and structurally repetitive compared to human texts.</a:t>
+              <a:t>∴ AI-generated texts were shorter, more redundant, and structurally repetitive compared to human texts.</a:t>
             </a:r>
           </a:p>
         </p:txBody>
@@ -4436,7 +5559,7 @@
 </p:sld>
 </file>
 
-<file path=ppt/slides/slide12.xml><?xml version="1.0" encoding="utf-8"?>
+<file path=ppt/slides/slide13.xml><?xml version="1.0" encoding="utf-8"?>
 <p:sld xmlns:a="http://schemas.openxmlformats.org/drawingml/2006/main" xmlns:r="http://schemas.openxmlformats.org/officeDocument/2006/relationships" xmlns:p="http://schemas.openxmlformats.org/presentationml/2006/main">
   <p:cSld>
     <p:bg>
@@ -4710,7 +5833,7 @@
         <p:spPr>
           <a:xfrm>
             <a:off x="487272" y="1972021"/>
-            <a:ext cx="17031330" cy="7254916"/>
+            <a:ext cx="17031330" cy="7358296"/>
           </a:xfrm>
           <a:prstGeom prst="rect">
             <a:avLst/>
@@ -4730,7 +5853,7 @@
               <a:buChar char="•"/>
             </a:pPr>
             <a:r>
-              <a:rPr lang="en-US" sz="3459" u="none" strike="noStrike">
+              <a:rPr lang="en-US" sz="3459" u="none" strike="noStrike" dirty="0">
                 <a:solidFill>
                   <a:srgbClr val="FFFCF4"/>
                 </a:solidFill>
@@ -4739,7 +5862,31 @@
                 <a:cs typeface="Times New Roman MT"/>
                 <a:sym typeface="Times New Roman MT"/>
               </a:rPr>
-              <a:t>Developed a complete Arabic AI-text detection pipeline — from data collection to model evaluation.</a:t>
+              <a:t>Developed a complete Arabic AI-text detection pipeline </a:t>
+            </a:r>
+            <a:r>
+              <a:rPr lang="en-US" sz="3459" dirty="0">
+                <a:solidFill>
+                  <a:srgbClr val="FFFCF4"/>
+                </a:solidFill>
+                <a:latin typeface="Times New Roman MT"/>
+                <a:ea typeface="Times New Roman MT"/>
+                <a:cs typeface="Times New Roman MT"/>
+                <a:sym typeface="Times New Roman MT"/>
+              </a:rPr>
+              <a:t>(</a:t>
+            </a:r>
+            <a:r>
+              <a:rPr lang="en-US" sz="3459" u="none" strike="noStrike" dirty="0">
+                <a:solidFill>
+                  <a:srgbClr val="FFFCF4"/>
+                </a:solidFill>
+                <a:latin typeface="Times New Roman MT"/>
+                <a:ea typeface="Times New Roman MT"/>
+                <a:cs typeface="Times New Roman MT"/>
+                <a:sym typeface="Times New Roman MT"/>
+              </a:rPr>
+              <a:t>from data collection to model evaluation).</a:t>
             </a:r>
           </a:p>
           <a:p>
@@ -4751,7 +5898,7 @@
               <a:buChar char="•"/>
             </a:pPr>
             <a:r>
-              <a:rPr lang="en-US" sz="3459" u="none" strike="noStrike">
+              <a:rPr lang="en-US" sz="3459" u="none" strike="noStrike" dirty="0">
                 <a:solidFill>
                   <a:srgbClr val="FFFCF4"/>
                 </a:solidFill>
@@ -4772,7 +5919,7 @@
               <a:buChar char="•"/>
             </a:pPr>
             <a:r>
-              <a:rPr lang="en-US" sz="3459" u="none" strike="noStrike">
+              <a:rPr lang="en-US" sz="3459" u="none" strike="noStrike" dirty="0">
                 <a:solidFill>
                   <a:srgbClr val="FFFCF4"/>
                 </a:solidFill>
@@ -4781,7 +5928,7 @@
                 <a:cs typeface="Times New Roman MT"/>
                 <a:sym typeface="Times New Roman MT"/>
               </a:rPr>
-              <a:t> Extracted stylometric features such as sentence count, redundancy score, short-word ratio, and vocabulary richness to capture writing patterns.</a:t>
+              <a:t> Extracted stylometric features such as sentence count, redundancy score, short-word ratio, number of active voices, and vocabulary richness to capture writing patterns.</a:t>
             </a:r>
           </a:p>
           <a:p>
@@ -4793,7 +5940,7 @@
               <a:buChar char="•"/>
             </a:pPr>
             <a:r>
-              <a:rPr lang="en-US" sz="3459" u="none" strike="noStrike">
+              <a:rPr lang="en-US" sz="3459" u="none" strike="noStrike" dirty="0">
                 <a:solidFill>
                   <a:srgbClr val="FFFCF4"/>
                 </a:solidFill>
@@ -4802,7 +5949,31 @@
                 <a:cs typeface="Times New Roman MT"/>
                 <a:sym typeface="Times New Roman MT"/>
               </a:rPr>
-              <a:t> Applied SMOTE to balance the dataset and StandardScaler to normalize numerical features, ensuring fair model training and consistent performance.</a:t>
+              <a:t> Applied SMOTE to balance the dataset and </a:t>
+            </a:r>
+            <a:r>
+              <a:rPr lang="en-US" sz="3459" u="none" strike="noStrike" dirty="0" err="1">
+                <a:solidFill>
+                  <a:srgbClr val="FFFCF4"/>
+                </a:solidFill>
+                <a:latin typeface="Times New Roman MT"/>
+                <a:ea typeface="Times New Roman MT"/>
+                <a:cs typeface="Times New Roman MT"/>
+                <a:sym typeface="Times New Roman MT"/>
+              </a:rPr>
+              <a:t>StandardScaler</a:t>
+            </a:r>
+            <a:r>
+              <a:rPr lang="en-US" sz="3459" u="none" strike="noStrike" dirty="0">
+                <a:solidFill>
+                  <a:srgbClr val="FFFCF4"/>
+                </a:solidFill>
+                <a:latin typeface="Times New Roman MT"/>
+                <a:ea typeface="Times New Roman MT"/>
+                <a:cs typeface="Times New Roman MT"/>
+                <a:sym typeface="Times New Roman MT"/>
+              </a:rPr>
+              <a:t> to normalize numerical features, ensuring fair model training and consistent performance.</a:t>
             </a:r>
           </a:p>
           <a:p>
@@ -4814,7 +5985,7 @@
               <a:buChar char="•"/>
             </a:pPr>
             <a:r>
-              <a:rPr lang="en-US" sz="3459" u="none" strike="noStrike">
+              <a:rPr lang="en-US" sz="3459" u="none" strike="noStrike" dirty="0">
                 <a:solidFill>
                   <a:srgbClr val="FFFCF4"/>
                 </a:solidFill>
@@ -4835,7 +6006,7 @@
               <a:buChar char="•"/>
             </a:pPr>
             <a:r>
-              <a:rPr lang="en-US" sz="3459" u="none" strike="noStrike">
+              <a:rPr lang="en-US" sz="3459" u="none" strike="noStrike" dirty="0">
                 <a:solidFill>
                   <a:srgbClr val="FFFCF4"/>
                 </a:solidFill>
@@ -4844,7 +6015,31 @@
                 <a:cs typeface="Times New Roman MT"/>
                 <a:sym typeface="Times New Roman MT"/>
               </a:rPr>
-              <a:t> XGBoost with TF-IDF achieved the best overall performance (95.1% accuracy, 0.950 F1-score), confirming the strength of lexical features for Arabic text classification.</a:t>
+              <a:t> </a:t>
+            </a:r>
+            <a:r>
+              <a:rPr lang="en-US" sz="3459" u="none" strike="noStrike" dirty="0" err="1">
+                <a:solidFill>
+                  <a:srgbClr val="FFFCF4"/>
+                </a:solidFill>
+                <a:latin typeface="Times New Roman MT"/>
+                <a:ea typeface="Times New Roman MT"/>
+                <a:cs typeface="Times New Roman MT"/>
+                <a:sym typeface="Times New Roman MT"/>
+              </a:rPr>
+              <a:t>XGBoost</a:t>
+            </a:r>
+            <a:r>
+              <a:rPr lang="en-US" sz="3459" u="none" strike="noStrike" dirty="0">
+                <a:solidFill>
+                  <a:srgbClr val="FFFCF4"/>
+                </a:solidFill>
+                <a:latin typeface="Times New Roman MT"/>
+                <a:ea typeface="Times New Roman MT"/>
+                <a:cs typeface="Times New Roman MT"/>
+                <a:sym typeface="Times New Roman MT"/>
+              </a:rPr>
+              <a:t> with TF-IDF achieved the best overall performance (95.1% accuracy, 0.950 F1-score), confirming the strength of lexical features for Arabic text classification.</a:t>
             </a:r>
           </a:p>
         </p:txBody>
@@ -4888,7 +6083,7 @@
 </p:sld>
 </file>
 
-<file path=ppt/slides/slide13.xml><?xml version="1.0" encoding="utf-8"?>
+<file path=ppt/slides/slide14.xml><?xml version="1.0" encoding="utf-8"?>
 <p:sld xmlns:a="http://schemas.openxmlformats.org/drawingml/2006/main" xmlns:r="http://schemas.openxmlformats.org/officeDocument/2006/relationships" xmlns:p="http://schemas.openxmlformats.org/presentationml/2006/main">
   <p:cSld>
     <p:bg>
@@ -5550,7 +6745,7 @@
         <p:spPr>
           <a:xfrm>
             <a:off x="1009650" y="2798375"/>
-            <a:ext cx="11191464" cy="5793870"/>
+            <a:ext cx="11191464" cy="5101461"/>
           </a:xfrm>
           <a:prstGeom prst="rect">
             <a:avLst/>
@@ -5570,7 +6765,7 @@
               <a:buChar char="•"/>
             </a:pPr>
             <a:r>
-              <a:rPr lang="en-US" sz="3641">
+              <a:rPr lang="en-US" sz="3641" u="none" strike="noStrike" dirty="0">
                 <a:solidFill>
                   <a:srgbClr val="FFFCF4"/>
                 </a:solidFill>
@@ -5579,10 +6774,10 @@
                 <a:cs typeface="Times New Roman MT"/>
                 <a:sym typeface="Times New Roman MT"/>
               </a:rPr>
-              <a:t>A</a:t>
-            </a:r>
-            <a:r>
-              <a:rPr lang="en-US" sz="3641" u="none" strike="noStrike">
+              <a:t>In recent </a:t>
+            </a:r>
+            <a:r>
+              <a:rPr lang="en-US" sz="3641" u="none" strike="noStrike" dirty="0" err="1">
                 <a:solidFill>
                   <a:srgbClr val="FFFCF4"/>
                 </a:solidFill>
@@ -5591,11 +6786,83 @@
                 <a:cs typeface="Times New Roman MT"/>
                 <a:sym typeface="Times New Roman MT"/>
               </a:rPr>
-              <a:t>rabic AI-text detection is still underdeveloped compared to English.</a:t>
-            </a:r>
-          </a:p>
-          <a:p>
-            <a:pPr marL="786194" lvl="1" indent="-393097" algn="l">
+              <a:t>years,</a:t>
+            </a:r>
+            <a:r>
+              <a:rPr lang="en-US" sz="3641" dirty="0" err="1">
+                <a:solidFill>
+                  <a:srgbClr val="FFFCF4"/>
+                </a:solidFill>
+                <a:latin typeface="Times New Roman MT"/>
+                <a:ea typeface="Times New Roman MT"/>
+                <a:cs typeface="Times New Roman MT"/>
+                <a:sym typeface="Times New Roman MT"/>
+              </a:rPr>
+              <a:t>l</a:t>
+            </a:r>
+            <a:r>
+              <a:rPr lang="en-US" sz="3641" u="none" strike="noStrike" dirty="0" err="1">
+                <a:solidFill>
+                  <a:srgbClr val="FFFCF4"/>
+                </a:solidFill>
+                <a:latin typeface="Times New Roman MT"/>
+                <a:ea typeface="Times New Roman MT"/>
+                <a:cs typeface="Times New Roman MT"/>
+                <a:sym typeface="Times New Roman MT"/>
+              </a:rPr>
+              <a:t>arge</a:t>
+            </a:r>
+            <a:r>
+              <a:rPr lang="en-US" sz="3641" u="none" strike="noStrike" dirty="0">
+                <a:solidFill>
+                  <a:srgbClr val="FFFCF4"/>
+                </a:solidFill>
+                <a:latin typeface="Times New Roman MT"/>
+                <a:ea typeface="Times New Roman MT"/>
+                <a:cs typeface="Times New Roman MT"/>
+                <a:sym typeface="Times New Roman MT"/>
+              </a:rPr>
+              <a:t> Language Models (LLMs) like GPT-4, </a:t>
+            </a:r>
+            <a:r>
+              <a:rPr lang="en-US" sz="3641" u="none" strike="noStrike" dirty="0" err="1">
+                <a:solidFill>
+                  <a:srgbClr val="FFFCF4"/>
+                </a:solidFill>
+                <a:latin typeface="Times New Roman MT"/>
+                <a:ea typeface="Times New Roman MT"/>
+                <a:cs typeface="Times New Roman MT"/>
+                <a:sym typeface="Times New Roman MT"/>
+              </a:rPr>
+              <a:t>LLaMA</a:t>
+            </a:r>
+            <a:r>
+              <a:rPr lang="en-US" sz="3641" dirty="0">
+                <a:solidFill>
+                  <a:srgbClr val="FFFCF4"/>
+                </a:solidFill>
+                <a:latin typeface="Times New Roman MT"/>
+                <a:ea typeface="Times New Roman MT"/>
+                <a:cs typeface="Times New Roman MT"/>
+                <a:sym typeface="Times New Roman MT"/>
+              </a:rPr>
+              <a:t> and</a:t>
+            </a:r>
+            <a:r>
+              <a:rPr lang="en-US" sz="3641" u="none" strike="noStrike" dirty="0">
+                <a:solidFill>
+                  <a:srgbClr val="FFFCF4"/>
+                </a:solidFill>
+                <a:latin typeface="Times New Roman MT"/>
+                <a:ea typeface="Times New Roman MT"/>
+                <a:cs typeface="Times New Roman MT"/>
+                <a:sym typeface="Times New Roman MT"/>
+              </a:rPr>
+              <a:t> Jais can generate Arabic text that is almost identical to human writing.</a:t>
+            </a:r>
+          </a:p>
+          <a:p>
+            <a:pPr marL="786194" lvl="1" indent="-393097">
               <a:lnSpc>
                 <a:spcPts val="5025"/>
               </a:lnSpc>
@@ -5603,7 +6870,7 @@
               <a:buChar char="•"/>
             </a:pPr>
             <a:r>
-              <a:rPr lang="en-US" sz="3641" u="none" strike="noStrike">
+              <a:rPr lang="en-US" sz="3641" dirty="0">
                 <a:solidFill>
                   <a:srgbClr val="FFFCF4"/>
                 </a:solidFill>
@@ -5612,11 +6879,23 @@
                 <a:cs typeface="Times New Roman MT"/>
                 <a:sym typeface="Times New Roman MT"/>
               </a:rPr>
-              <a:t>Large Language Models (LLMs) like GPT-4, LLaMA, Jais can generate Arabic text almost identical to human writing.</a:t>
-            </a:r>
-          </a:p>
-          <a:p>
-            <a:pPr marL="786194" lvl="1" indent="-393097" algn="l">
+              <a:t>Arabic AI-text detection is still underdeveloped compared to English, due to t</a:t>
+            </a:r>
+            <a:r>
+              <a:rPr lang="en-US" sz="3641" u="none" strike="noStrike" dirty="0">
+                <a:solidFill>
+                  <a:srgbClr val="FFFCF4"/>
+                </a:solidFill>
+                <a:latin typeface="Times New Roman MT"/>
+                <a:ea typeface="Times New Roman MT"/>
+                <a:cs typeface="Times New Roman MT"/>
+                <a:sym typeface="Times New Roman MT"/>
+              </a:rPr>
+              <a:t>he lack of annotated Arabic datasets.</a:t>
+            </a:r>
+          </a:p>
+          <a:p>
+            <a:pPr marL="786194" lvl="1" indent="-393097">
               <a:lnSpc>
                 <a:spcPts val="5025"/>
               </a:lnSpc>
@@ -5624,7 +6903,7 @@
               <a:buChar char="•"/>
             </a:pPr>
             <a:r>
-              <a:rPr lang="en-US" sz="3641" u="none" strike="noStrike">
+              <a:rPr lang="en-US" sz="3641" u="none" strike="noStrike" dirty="0">
                 <a:solidFill>
                   <a:srgbClr val="FFFCF4"/>
                 </a:solidFill>
@@ -5633,28 +6912,7 @@
                 <a:cs typeface="Times New Roman MT"/>
                 <a:sym typeface="Times New Roman MT"/>
               </a:rPr>
-              <a:t>The lack of annotated Arabic datasets makes it difficult to detect AI-generated content.</a:t>
-            </a:r>
-          </a:p>
-          <a:p>
-            <a:pPr marL="786194" lvl="1" indent="-393097" algn="l">
-              <a:lnSpc>
-                <a:spcPts val="5025"/>
-              </a:lnSpc>
-              <a:buFont typeface="Arial"/>
-              <a:buChar char="•"/>
-            </a:pPr>
-            <a:r>
-              <a:rPr lang="en-US" sz="3641" u="none" strike="noStrike">
-                <a:solidFill>
-                  <a:srgbClr val="FFFCF4"/>
-                </a:solidFill>
-                <a:latin typeface="Times New Roman MT"/>
-                <a:ea typeface="Times New Roman MT"/>
-                <a:cs typeface="Times New Roman MT"/>
-                <a:sym typeface="Times New Roman MT"/>
-              </a:rPr>
-              <a:t>This raises risks in academic integrity, fake research, and digital misinformation.</a:t>
+              <a:t>This raises some risks regarding academic integrity, fake research, and digital misinformation.</a:t>
             </a:r>
           </a:p>
         </p:txBody>
@@ -5851,7 +7109,7 @@
         <p:spPr>
           <a:xfrm>
             <a:off x="1028700" y="2453055"/>
-            <a:ext cx="16766112" cy="6337133"/>
+            <a:ext cx="16766112" cy="6382325"/>
           </a:xfrm>
           <a:prstGeom prst="rect">
             <a:avLst/>
@@ -5890,7 +7148,7 @@
                 <a:cs typeface="Times New Roman MT"/>
                 <a:sym typeface="Times New Roman MT"/>
               </a:rPr>
-              <a:t> multi-stage preprocessing pipeline was implemented to handle the linguistic complexity of Arabic:</a:t>
+              <a:t> multi-stage preprocessing pipeline was implemented to handle the linguistic complexity of Arabic text:</a:t>
             </a:r>
           </a:p>
           <a:p>
@@ -5945,10 +7203,10 @@
                 <a:sym typeface="Times New Roman MT"/>
                 <a:rtl/>
               </a:rPr>
-              <a:t>أ / إ / آ → ا, ى → ي, ة → ه</a:t>
-            </a:r>
-            <a:r>
-              <a:rPr lang="en-US" sz="3599" u="none" strike="noStrike" dirty="0">
+              <a:t>أ / إ / آ →  ا</a:t>
+            </a:r>
+            <a:r>
+              <a:rPr lang="en-US" sz="3599">
                 <a:solidFill>
                   <a:srgbClr val="FFFCF4"/>
                 </a:solidFill>
@@ -5956,9 +7214,20 @@
                 <a:ea typeface="Times New Roman MT"/>
                 <a:cs typeface="Times New Roman MT"/>
                 <a:sym typeface="Times New Roman MT"/>
-              </a:rPr>
-              <a:t>).</a:t>
-            </a:r>
+                <a:rtl/>
+              </a:rPr>
+              <a:t>   )</a:t>
+            </a:r>
+            <a:endParaRPr lang="ar-SA" sz="3599" dirty="0">
+              <a:solidFill>
+                <a:srgbClr val="FFFCF4"/>
+              </a:solidFill>
+              <a:latin typeface="Times New Roman MT"/>
+              <a:ea typeface="Times New Roman MT"/>
+              <a:cs typeface="Times New Roman MT"/>
+              <a:sym typeface="Times New Roman MT"/>
+              <a:rtl/>
+            </a:endParaRPr>
           </a:p>
           <a:p>
             <a:pPr marL="1554474" lvl="2" indent="-518158" algn="l">
@@ -6420,7 +7689,7 @@
         <p:spPr>
           <a:xfrm>
             <a:off x="1028700" y="2389543"/>
-            <a:ext cx="16766112" cy="5079917"/>
+            <a:ext cx="16766112" cy="4458721"/>
           </a:xfrm>
           <a:prstGeom prst="rect">
             <a:avLst/>
@@ -6440,7 +7709,7 @@
               <a:buChar char="•"/>
             </a:pPr>
             <a:r>
-              <a:rPr lang="en-US" sz="3599" b="1" u="none" strike="noStrike">
+              <a:rPr lang="en-US" sz="3599" b="1" u="none" strike="noStrike" dirty="0">
                 <a:solidFill>
                   <a:srgbClr val="FFFCF4"/>
                 </a:solidFill>
@@ -6449,7 +7718,31 @@
                 <a:cs typeface="Times New Roman MT Bold"/>
                 <a:sym typeface="Times New Roman MT Bold"/>
               </a:rPr>
-              <a:t>Tokenization &amp; Stopword Removal:</a:t>
+              <a:t>Tokenization &amp; </a:t>
+            </a:r>
+            <a:r>
+              <a:rPr lang="en-US" sz="3599" b="1" u="none" strike="noStrike" dirty="0" err="1">
+                <a:solidFill>
+                  <a:srgbClr val="FFFCF4"/>
+                </a:solidFill>
+                <a:latin typeface="Times New Roman MT Bold"/>
+                <a:ea typeface="Times New Roman MT Bold"/>
+                <a:cs typeface="Times New Roman MT Bold"/>
+                <a:sym typeface="Times New Roman MT Bold"/>
+              </a:rPr>
+              <a:t>Stopword</a:t>
+            </a:r>
+            <a:r>
+              <a:rPr lang="en-US" sz="3599" b="1" u="none" strike="noStrike" dirty="0">
+                <a:solidFill>
+                  <a:srgbClr val="FFFCF4"/>
+                </a:solidFill>
+                <a:latin typeface="Times New Roman MT Bold"/>
+                <a:ea typeface="Times New Roman MT Bold"/>
+                <a:cs typeface="Times New Roman MT Bold"/>
+                <a:sym typeface="Times New Roman MT Bold"/>
+              </a:rPr>
+              <a:t> Removal:</a:t>
             </a:r>
           </a:p>
           <a:p>
@@ -6461,7 +7754,7 @@
               <a:buChar char="⚬"/>
             </a:pPr>
             <a:r>
-              <a:rPr lang="en-US" sz="3599" u="none" strike="noStrike">
+              <a:rPr lang="en-US" sz="3599" u="none" strike="noStrike" dirty="0">
                 <a:solidFill>
                   <a:srgbClr val="FFFCF4"/>
                 </a:solidFill>
@@ -6470,7 +7763,31 @@
                 <a:cs typeface="Times New Roman MT"/>
                 <a:sym typeface="Times New Roman MT"/>
               </a:rPr>
-              <a:t>Used NLTK Arabic tokenizer and extended stopword lists (NLTK + GitHub custom).</a:t>
+              <a:t>Used NLTK Arabic tokenizer and extended the </a:t>
+            </a:r>
+            <a:r>
+              <a:rPr lang="en-US" sz="3599" u="none" strike="noStrike" dirty="0" err="1">
+                <a:solidFill>
+                  <a:srgbClr val="FFFCF4"/>
+                </a:solidFill>
+                <a:latin typeface="Times New Roman MT"/>
+                <a:ea typeface="Times New Roman MT"/>
+                <a:cs typeface="Times New Roman MT"/>
+                <a:sym typeface="Times New Roman MT"/>
+              </a:rPr>
+              <a:t>stopword</a:t>
+            </a:r>
+            <a:r>
+              <a:rPr lang="en-US" sz="3599" u="none" strike="noStrike" dirty="0">
+                <a:solidFill>
+                  <a:srgbClr val="FFFCF4"/>
+                </a:solidFill>
+                <a:latin typeface="Times New Roman MT"/>
+                <a:ea typeface="Times New Roman MT"/>
+                <a:cs typeface="Times New Roman MT"/>
+                <a:sym typeface="Times New Roman MT"/>
+              </a:rPr>
+              <a:t> lists.</a:t>
             </a:r>
           </a:p>
           <a:p>
@@ -6482,7 +7799,7 @@
               <a:buChar char="•"/>
             </a:pPr>
             <a:r>
-              <a:rPr lang="en-US" sz="3599" b="1" u="none" strike="noStrike">
+              <a:rPr lang="en-US" sz="3599" b="1" u="none" strike="noStrike" dirty="0">
                 <a:solidFill>
                   <a:srgbClr val="FFFCF4"/>
                 </a:solidFill>
@@ -6503,7 +7820,7 @@
               <a:buChar char="⚬"/>
             </a:pPr>
             <a:r>
-              <a:rPr lang="en-US" sz="3599" u="none" strike="noStrike">
+              <a:rPr lang="en-US" sz="3599" u="none" strike="noStrike" dirty="0">
                 <a:solidFill>
                   <a:srgbClr val="FFFCF4"/>
                 </a:solidFill>
@@ -6524,7 +7841,7 @@
               <a:buChar char="⚬"/>
             </a:pPr>
             <a:r>
-              <a:rPr lang="en-US" sz="3599" u="none" strike="noStrike">
+              <a:rPr lang="en-US" sz="3599" u="none" strike="noStrike" dirty="0">
                 <a:solidFill>
                   <a:srgbClr val="FFFCF4"/>
                 </a:solidFill>
@@ -6545,7 +7862,7 @@
               <a:buChar char="•"/>
             </a:pPr>
             <a:r>
-              <a:rPr lang="en-US" sz="3599" b="1" u="none" strike="noStrike">
+              <a:rPr lang="en-US" sz="3599" b="1" u="none" strike="noStrike" dirty="0">
                 <a:solidFill>
                   <a:srgbClr val="FFFCF4"/>
                 </a:solidFill>
@@ -6566,7 +7883,7 @@
               <a:buChar char="⚬"/>
             </a:pPr>
             <a:r>
-              <a:rPr lang="en-US" sz="3599" u="none" strike="noStrike">
+              <a:rPr lang="en-US" sz="3599" u="none" strike="noStrike" dirty="0">
                 <a:solidFill>
                   <a:srgbClr val="FFFCF4"/>
                 </a:solidFill>
@@ -6983,7 +8300,7 @@
         <p:spPr>
           <a:xfrm>
             <a:off x="712405" y="2112435"/>
-            <a:ext cx="16546895" cy="5079917"/>
+            <a:ext cx="16546895" cy="4453655"/>
           </a:xfrm>
           <a:prstGeom prst="rect">
             <a:avLst/>
@@ -7002,7 +8319,7 @@
               <a:buAutoNum type="arabicPeriod"/>
             </a:pPr>
             <a:r>
-              <a:rPr lang="en-US" sz="3600" b="1">
+              <a:rPr lang="en-US" sz="3600" b="1" dirty="0">
                 <a:solidFill>
                   <a:srgbClr val="FFFCF4"/>
                 </a:solidFill>
@@ -7023,7 +8340,7 @@
               <a:buChar char="•"/>
             </a:pPr>
             <a:r>
-              <a:rPr lang="en-US" sz="3600">
+              <a:rPr lang="en-US" sz="3600" dirty="0">
                 <a:solidFill>
                   <a:srgbClr val="FFFCF4"/>
                 </a:solidFill>
@@ -7044,7 +8361,7 @@
               <a:buChar char="⚬"/>
             </a:pPr>
             <a:r>
-              <a:rPr lang="en-US" sz="3600">
+              <a:rPr lang="en-US" sz="3600" dirty="0">
                 <a:solidFill>
                   <a:srgbClr val="FFFCF4"/>
                 </a:solidFill>
@@ -7065,7 +8382,7 @@
               <a:buChar char="⚬"/>
             </a:pPr>
             <a:r>
-              <a:rPr lang="en-US" sz="3600">
+              <a:rPr lang="en-US" sz="3600" dirty="0">
                 <a:solidFill>
                   <a:srgbClr val="FFFCF4"/>
                 </a:solidFill>
@@ -7074,7 +8391,31 @@
                 <a:cs typeface="Times New Roman MT"/>
                 <a:sym typeface="Times New Roman MT"/>
               </a:rPr>
-              <a:t>Allam: 9.7%, LLaMA: 8.9%, OpenAI: 8.1%.</a:t>
+              <a:t>Allam: 9.7%, </a:t>
+            </a:r>
+            <a:r>
+              <a:rPr lang="en-US" sz="3600" dirty="0" err="1">
+                <a:solidFill>
+                  <a:srgbClr val="FFFCF4"/>
+                </a:solidFill>
+                <a:latin typeface="Times New Roman MT"/>
+                <a:ea typeface="Times New Roman MT"/>
+                <a:cs typeface="Times New Roman MT"/>
+                <a:sym typeface="Times New Roman MT"/>
+              </a:rPr>
+              <a:t>LLaMA</a:t>
+            </a:r>
+            <a:r>
+              <a:rPr lang="en-US" sz="3600" dirty="0">
+                <a:solidFill>
+                  <a:srgbClr val="FFFCF4"/>
+                </a:solidFill>
+                <a:latin typeface="Times New Roman MT"/>
+                <a:ea typeface="Times New Roman MT"/>
+                <a:cs typeface="Times New Roman MT"/>
+                <a:sym typeface="Times New Roman MT"/>
+              </a:rPr>
+              <a:t>: 8.9%, OpenAI: 8.1%.</a:t>
             </a:r>
           </a:p>
           <a:p>
@@ -7086,7 +8427,7 @@
               <a:buChar char="•"/>
             </a:pPr>
             <a:r>
-              <a:rPr lang="en-US" sz="3600">
+              <a:rPr lang="en-US" sz="3600" dirty="0">
                 <a:solidFill>
                   <a:srgbClr val="FFFCF4"/>
                 </a:solidFill>
@@ -7105,7 +8446,7 @@
               </a:lnSpc>
             </a:pPr>
             <a:r>
-              <a:rPr lang="en-US" sz="3600">
+              <a:rPr lang="en-US" sz="3600" b="1" dirty="0">
                 <a:solidFill>
                   <a:srgbClr val="FFFCF4"/>
                 </a:solidFill>
@@ -7114,7 +8455,7 @@
                 <a:cs typeface="Times New Roman MT"/>
                 <a:sym typeface="Times New Roman MT"/>
               </a:rPr>
-              <a:t>Insight: Human and Jais texts show richer linguistic flow; OpenAI more formal and structured.</a:t>
+              <a:t>Insight: Human and Jais texts include more short connectives and functional words </a:t>
             </a:r>
           </a:p>
           <a:p>
@@ -7124,17 +8465,47 @@
               </a:lnSpc>
             </a:pPr>
             <a:r>
-              <a:rPr lang="en-US" sz="3600">
-                <a:solidFill>
-                  <a:srgbClr val="FFFCF4"/>
-                </a:solidFill>
-                <a:latin typeface="Times New Roman MT"/>
-                <a:ea typeface="Times New Roman MT"/>
-                <a:cs typeface="Times New Roman MT"/>
-                <a:sym typeface="Times New Roman MT"/>
-              </a:rPr>
-              <a:t>    </a:t>
-            </a:r>
+              <a:rPr lang="en-US" sz="3600" b="1" dirty="0">
+                <a:solidFill>
+                  <a:schemeClr val="bg1"/>
+                </a:solidFill>
+                <a:effectLst/>
+                <a:latin typeface="Times New Roman" panose="02020603050405020304" pitchFamily="18" charset="0"/>
+                <a:ea typeface="Arial" panose="020B0604020202020204" pitchFamily="34" charset="0"/>
+              </a:rPr>
+              <a:t>(e.g., “</a:t>
+            </a:r>
+            <a:r>
+              <a:rPr lang="ar-SA" sz="3600" b="1" dirty="0">
+                <a:solidFill>
+                  <a:schemeClr val="bg1"/>
+                </a:solidFill>
+                <a:effectLst/>
+                <a:ea typeface="Arial" panose="020B0604020202020204" pitchFamily="34" charset="0"/>
+                <a:cs typeface="Times New Roman" panose="02020603050405020304" pitchFamily="18" charset="0"/>
+              </a:rPr>
+              <a:t>في”, “من”, “عن</a:t>
+            </a:r>
+            <a:r>
+              <a:rPr lang="en-US" sz="3600" b="1" dirty="0">
+                <a:solidFill>
+                  <a:schemeClr val="bg1"/>
+                </a:solidFill>
+                <a:effectLst/>
+                <a:latin typeface="Times New Roman" panose="02020603050405020304" pitchFamily="18" charset="0"/>
+                <a:ea typeface="Arial" panose="020B0604020202020204" pitchFamily="34" charset="0"/>
+              </a:rPr>
+              <a:t>”).</a:t>
+            </a:r>
+            <a:endParaRPr lang="en-US" sz="3600" dirty="0">
+              <a:solidFill>
+                <a:srgbClr val="FFFCF4"/>
+              </a:solidFill>
+              <a:latin typeface="Times New Roman MT"/>
+              <a:ea typeface="Times New Roman MT"/>
+              <a:cs typeface="Times New Roman MT"/>
+              <a:sym typeface="Times New Roman MT"/>
+            </a:endParaRPr>
           </a:p>
         </p:txBody>
       </p:sp>
@@ -7205,6 +8576,361 @@
       <p:sp>
         <p:nvSpPr>
           <p:cNvPr id="5" name="Freeform 5"/>
+          <p:cNvSpPr/>
+          <p:nvPr/>
+        </p:nvSpPr>
+        <p:spPr>
+          <a:xfrm>
+            <a:off x="16245812" y="1303350"/>
+            <a:ext cx="922084" cy="230521"/>
+          </a:xfrm>
+          <a:custGeom>
+            <a:avLst/>
+            <a:gdLst/>
+            <a:ahLst/>
+            <a:cxnLst/>
+            <a:rect l="l" t="t" r="r" b="b"/>
+            <a:pathLst>
+              <a:path w="922084" h="230521">
+                <a:moveTo>
+                  <a:pt x="0" y="0"/>
+                </a:moveTo>
+                <a:lnTo>
+                  <a:pt x="922084" y="0"/>
+                </a:lnTo>
+                <a:lnTo>
+                  <a:pt x="922084" y="230521"/>
+                </a:lnTo>
+                <a:lnTo>
+                  <a:pt x="0" y="230521"/>
+                </a:lnTo>
+                <a:lnTo>
+                  <a:pt x="0" y="0"/>
+                </a:lnTo>
+                <a:close/>
+              </a:path>
+            </a:pathLst>
+          </a:custGeom>
+          <a:blipFill>
+            <a:blip r:embed="rId3">
+              <a:extLst>
+                <a:ext uri="{96DAC541-7B7A-43D3-8B79-37D633B846F1}">
+                  <asvg:svgBlip xmlns:asvg="http://schemas.microsoft.com/office/drawing/2016/SVG/main" r:embed="rId4"/>
+                </a:ext>
+              </a:extLst>
+            </a:blip>
+            <a:stretch>
+              <a:fillRect/>
+            </a:stretch>
+          </a:blipFill>
+        </p:spPr>
+        <p:txBody>
+          <a:bodyPr/>
+          <a:lstStyle/>
+          <a:p>
+            <a:endParaRPr lang="en-US"/>
+          </a:p>
+        </p:txBody>
+      </p:sp>
+      <p:sp>
+        <p:nvSpPr>
+          <p:cNvPr id="6" name="AutoShape 6"/>
+          <p:cNvSpPr/>
+          <p:nvPr/>
+        </p:nvSpPr>
+        <p:spPr>
+          <a:xfrm flipV="1">
+            <a:off x="1028700" y="9771232"/>
+            <a:ext cx="16139196" cy="9525"/>
+          </a:xfrm>
+          <a:prstGeom prst="line">
+            <a:avLst/>
+          </a:prstGeom>
+          <a:ln w="66675" cap="flat">
+            <a:solidFill>
+              <a:srgbClr val="FFFCF4"/>
+            </a:solidFill>
+            <a:prstDash val="solid"/>
+            <a:headEnd type="none" w="sm" len="sm"/>
+            <a:tailEnd type="none" w="sm" len="sm"/>
+          </a:ln>
+        </p:spPr>
+        <p:txBody>
+          <a:bodyPr/>
+          <a:lstStyle/>
+          <a:p>
+            <a:endParaRPr lang="en-US"/>
+          </a:p>
+        </p:txBody>
+      </p:sp>
+      <p:sp>
+        <p:nvSpPr>
+          <p:cNvPr id="7" name="TextBox 7"/>
+          <p:cNvSpPr txBox="1"/>
+          <p:nvPr/>
+        </p:nvSpPr>
+        <p:spPr>
+          <a:xfrm>
+            <a:off x="1028700" y="1129038"/>
+            <a:ext cx="12953291" cy="847767"/>
+          </a:xfrm>
+          <a:prstGeom prst="rect">
+            <a:avLst/>
+          </a:prstGeom>
+        </p:spPr>
+        <p:txBody>
+          <a:bodyPr lIns="0" tIns="0" rIns="0" bIns="0" rtlCol="0" anchor="t">
+            <a:spAutoFit/>
+          </a:bodyPr>
+          <a:lstStyle/>
+          <a:p>
+            <a:pPr marL="0" lvl="0" indent="0" algn="l">
+              <a:lnSpc>
+                <a:spcPts val="5999"/>
+              </a:lnSpc>
+              <a:spcBef>
+                <a:spcPct val="0"/>
+              </a:spcBef>
+            </a:pPr>
+            <a:r>
+              <a:rPr lang="en-US" sz="4999" b="1" spc="-149">
+                <a:solidFill>
+                  <a:srgbClr val="FFFCF4"/>
+                </a:solidFill>
+                <a:latin typeface="Times New Roman MT Bold"/>
+                <a:ea typeface="Times New Roman MT Bold"/>
+                <a:cs typeface="Times New Roman MT Bold"/>
+                <a:sym typeface="Times New Roman MT Bold"/>
+              </a:rPr>
+              <a:t> Feature Engineering Con’t</a:t>
+            </a:r>
+          </a:p>
+        </p:txBody>
+      </p:sp>
+      <p:sp>
+        <p:nvSpPr>
+          <p:cNvPr id="8" name="TextBox 8"/>
+          <p:cNvSpPr txBox="1"/>
+          <p:nvPr/>
+        </p:nvSpPr>
+        <p:spPr>
+          <a:xfrm>
+            <a:off x="1238171" y="2091105"/>
+            <a:ext cx="16619549" cy="4200702"/>
+          </a:xfrm>
+          <a:prstGeom prst="rect">
+            <a:avLst/>
+          </a:prstGeom>
+        </p:spPr>
+        <p:txBody>
+          <a:bodyPr lIns="0" tIns="0" rIns="0" bIns="0" rtlCol="0" anchor="t">
+            <a:spAutoFit/>
+          </a:bodyPr>
+          <a:lstStyle/>
+          <a:p>
+            <a:pPr algn="l">
+              <a:lnSpc>
+                <a:spcPts val="5519"/>
+              </a:lnSpc>
+            </a:pPr>
+            <a:r>
+              <a:rPr lang="en-US" sz="3999" b="1" dirty="0">
+                <a:solidFill>
+                  <a:srgbClr val="FFFCF4"/>
+                </a:solidFill>
+                <a:latin typeface="Times New Roman MT Bold"/>
+                <a:ea typeface="Times New Roman MT Bold"/>
+                <a:cs typeface="Times New Roman MT Bold"/>
+                <a:sym typeface="Times New Roman MT Bold"/>
+              </a:rPr>
+              <a:t>2. Sentence Count </a:t>
+            </a:r>
+          </a:p>
+          <a:p>
+            <a:pPr marL="863598" lvl="1" indent="-431799" algn="l">
+              <a:lnSpc>
+                <a:spcPts val="5519"/>
+              </a:lnSpc>
+              <a:buFont typeface="Arial"/>
+              <a:buChar char="•"/>
+            </a:pPr>
+            <a:r>
+              <a:rPr lang="en-US" sz="3999" dirty="0">
+                <a:solidFill>
+                  <a:srgbClr val="FFFCF4"/>
+                </a:solidFill>
+                <a:latin typeface="Times New Roman MT" panose="020B0604020202020204" charset="0"/>
+                <a:ea typeface="Times New Roman MT Bold"/>
+                <a:cs typeface="Times New Roman MT Bold"/>
+                <a:sym typeface="Times New Roman MT Bold"/>
+              </a:rPr>
+              <a:t>AI:</a:t>
+            </a:r>
+          </a:p>
+          <a:p>
+            <a:pPr marL="431799" lvl="1" algn="l">
+              <a:lnSpc>
+                <a:spcPts val="5519"/>
+              </a:lnSpc>
+            </a:pPr>
+            <a:r>
+              <a:rPr lang="en-US" sz="3999" dirty="0">
+                <a:solidFill>
+                  <a:srgbClr val="FFFCF4"/>
+                </a:solidFill>
+                <a:latin typeface="Times New Roman MT" panose="020B0604020202020204" charset="0"/>
+                <a:ea typeface="Times New Roman MT Bold"/>
+                <a:cs typeface="Times New Roman MT Bold"/>
+                <a:sym typeface="Times New Roman MT Bold"/>
+              </a:rPr>
+              <a:t>Allam: 4.49, Jais: 5.91, </a:t>
+            </a:r>
+            <a:r>
+              <a:rPr lang="en-US" sz="3999" dirty="0" err="1">
+                <a:solidFill>
+                  <a:srgbClr val="FFFCF4"/>
+                </a:solidFill>
+                <a:latin typeface="Times New Roman MT" panose="020B0604020202020204" charset="0"/>
+                <a:ea typeface="Times New Roman MT Bold"/>
+                <a:cs typeface="Times New Roman MT Bold"/>
+                <a:sym typeface="Times New Roman MT Bold"/>
+              </a:rPr>
+              <a:t>LLaMA</a:t>
+            </a:r>
+            <a:r>
+              <a:rPr lang="en-US" sz="3999" dirty="0">
+                <a:solidFill>
+                  <a:srgbClr val="FFFCF4"/>
+                </a:solidFill>
+                <a:latin typeface="Times New Roman MT" panose="020B0604020202020204" charset="0"/>
+                <a:ea typeface="Times New Roman MT Bold"/>
+                <a:cs typeface="Times New Roman MT Bold"/>
+                <a:sym typeface="Times New Roman MT Bold"/>
+              </a:rPr>
+              <a:t>: 5.66, OpenAI: 6.50 sentences on average.</a:t>
+            </a:r>
+          </a:p>
+          <a:p>
+            <a:pPr marL="863598" lvl="1" indent="-431799" algn="l">
+              <a:lnSpc>
+                <a:spcPts val="5519"/>
+              </a:lnSpc>
+              <a:buFont typeface="Arial"/>
+              <a:buChar char="•"/>
+            </a:pPr>
+            <a:r>
+              <a:rPr lang="en-US" sz="3999" dirty="0">
+                <a:solidFill>
+                  <a:srgbClr val="FFFCF4"/>
+                </a:solidFill>
+                <a:latin typeface="Times New Roman MT" panose="020B0604020202020204" charset="0"/>
+                <a:ea typeface="Times New Roman MT Bold"/>
+                <a:cs typeface="Times New Roman MT Bold"/>
+                <a:sym typeface="Times New Roman MT Bold"/>
+              </a:rPr>
+              <a:t>Original: 7.43 sentences (longer and more complex).</a:t>
+            </a:r>
+          </a:p>
+          <a:p>
+            <a:pPr algn="l">
+              <a:lnSpc>
+                <a:spcPts val="5519"/>
+              </a:lnSpc>
+            </a:pPr>
+            <a:r>
+              <a:rPr lang="en-US" sz="3999" b="1" dirty="0">
+                <a:solidFill>
+                  <a:srgbClr val="FFFCF4"/>
+                </a:solidFill>
+                <a:latin typeface="Times New Roman MT Bold"/>
+                <a:ea typeface="Times New Roman MT Bold"/>
+                <a:cs typeface="Times New Roman MT Bold"/>
+                <a:sym typeface="Times New Roman MT Bold"/>
+              </a:rPr>
+              <a:t>Insight: Human texts are more segmented and syntactically rich while AI outputs are concise and dense.</a:t>
+            </a:r>
+          </a:p>
+        </p:txBody>
+      </p:sp>
+      <p:sp>
+        <p:nvSpPr>
+          <p:cNvPr id="9" name="AutoShape 9"/>
+          <p:cNvSpPr/>
+          <p:nvPr/>
+        </p:nvSpPr>
+        <p:spPr>
+          <a:xfrm flipV="1">
+            <a:off x="1028700" y="1019175"/>
+            <a:ext cx="16139196" cy="9525"/>
+          </a:xfrm>
+          <a:prstGeom prst="line">
+            <a:avLst/>
+          </a:prstGeom>
+          <a:ln w="66675" cap="flat">
+            <a:solidFill>
+              <a:srgbClr val="FFFCF4"/>
+            </a:solidFill>
+            <a:prstDash val="solid"/>
+            <a:headEnd type="none" w="sm" len="sm"/>
+            <a:tailEnd type="none" w="sm" len="sm"/>
+          </a:ln>
+        </p:spPr>
+        <p:txBody>
+          <a:bodyPr/>
+          <a:lstStyle/>
+          <a:p>
+            <a:endParaRPr lang="en-US"/>
+          </a:p>
+        </p:txBody>
+      </p:sp>
+    </p:spTree>
+  </p:cSld>
+  <p:clrMapOvr>
+    <a:masterClrMapping/>
+  </p:clrMapOvr>
+</p:sld>
+</file>
+
+<file path=ppt/slides/slide7.xml><?xml version="1.0" encoding="utf-8"?>
+<p:sld xmlns:a="http://schemas.openxmlformats.org/drawingml/2006/main" xmlns:r="http://schemas.openxmlformats.org/officeDocument/2006/relationships" xmlns:p="http://schemas.openxmlformats.org/presentationml/2006/main">
+  <p:cSld>
+    <p:bg>
+      <p:bgPr>
+        <a:solidFill>
+          <a:srgbClr val="435663"/>
+        </a:solidFill>
+        <a:effectLst/>
+      </p:bgPr>
+    </p:bg>
+    <p:spTree>
+      <p:nvGrpSpPr>
+        <p:cNvPr id="1" name="">
+          <a:extLst>
+            <a:ext uri="{FF2B5EF4-FFF2-40B4-BE49-F238E27FC236}">
+              <a16:creationId xmlns:a16="http://schemas.microsoft.com/office/drawing/2014/main" id="{C36599C3-DD1C-AED6-0543-260C08933B48}"/>
+            </a:ext>
+          </a:extLst>
+        </p:cNvPr>
+        <p:cNvGrpSpPr/>
+        <p:nvPr/>
+      </p:nvGrpSpPr>
+      <p:grpSpPr>
+        <a:xfrm>
+          <a:off x="0" y="0"/>
+          <a:ext cx="0" cy="0"/>
+          <a:chOff x="0" y="0"/>
+          <a:chExt cx="0" cy="0"/>
+        </a:xfrm>
+      </p:grpSpPr>
+      <p:sp>
+        <p:nvSpPr>
+          <p:cNvPr id="5" name="Freeform 5">
+            <a:extLst>
+              <a:ext uri="{FF2B5EF4-FFF2-40B4-BE49-F238E27FC236}">
+                <a16:creationId xmlns:a16="http://schemas.microsoft.com/office/drawing/2014/main" id="{419F7953-550B-5ABC-8564-E24BA10212CC}"/>
+              </a:ext>
+            </a:extLst>
+          </p:cNvPr>
           <p:cNvSpPr/>
           <p:nvPr/>
         </p:nvSpPr>
@@ -7263,7 +8989,13 @@
       </p:sp>
       <p:sp>
         <p:nvSpPr>
-          <p:cNvPr id="6" name="AutoShape 6"/>
+          <p:cNvPr id="6" name="AutoShape 6">
+            <a:extLst>
+              <a:ext uri="{FF2B5EF4-FFF2-40B4-BE49-F238E27FC236}">
+                <a16:creationId xmlns:a16="http://schemas.microsoft.com/office/drawing/2014/main" id="{793E0F95-1D95-14F1-80C4-C4E6DD900D09}"/>
+              </a:ext>
+            </a:extLst>
+          </p:cNvPr>
           <p:cNvSpPr/>
           <p:nvPr/>
         </p:nvSpPr>
@@ -7294,7 +9026,13 @@
       </p:sp>
       <p:sp>
         <p:nvSpPr>
-          <p:cNvPr id="7" name="TextBox 7"/>
+          <p:cNvPr id="7" name="TextBox 7">
+            <a:extLst>
+              <a:ext uri="{FF2B5EF4-FFF2-40B4-BE49-F238E27FC236}">
+                <a16:creationId xmlns:a16="http://schemas.microsoft.com/office/drawing/2014/main" id="{EA5FB0B0-2E26-0011-3877-DB43E9DCAAAF}"/>
+              </a:ext>
+            </a:extLst>
+          </p:cNvPr>
           <p:cNvSpPr txBox="1"/>
           <p:nvPr/>
         </p:nvSpPr>
@@ -7338,26 +9076,32 @@
       </p:sp>
       <p:sp>
         <p:nvSpPr>
-          <p:cNvPr id="8" name="TextBox 8"/>
+          <p:cNvPr id="8" name="TextBox 8">
+            <a:extLst>
+              <a:ext uri="{FF2B5EF4-FFF2-40B4-BE49-F238E27FC236}">
+                <a16:creationId xmlns:a16="http://schemas.microsoft.com/office/drawing/2014/main" id="{FEE118B6-BB4B-C694-2592-452A4223FFA0}"/>
+              </a:ext>
+            </a:extLst>
+          </p:cNvPr>
           <p:cNvSpPr txBox="1"/>
           <p:nvPr/>
         </p:nvSpPr>
         <p:spPr>
           <a:xfrm>
             <a:off x="1238171" y="2091105"/>
-            <a:ext cx="16619549" cy="4200702"/>
+            <a:ext cx="16619549" cy="3480953"/>
           </a:xfrm>
           <a:prstGeom prst="rect">
             <a:avLst/>
           </a:prstGeom>
         </p:spPr>
         <p:txBody>
-          <a:bodyPr lIns="0" tIns="0" rIns="0" bIns="0" rtlCol="0" anchor="t">
+          <a:bodyPr wrap="square" lIns="0" tIns="0" rIns="0" bIns="0" rtlCol="0" anchor="t">
             <a:spAutoFit/>
           </a:bodyPr>
           <a:lstStyle/>
           <a:p>
-            <a:pPr algn="l">
+            <a:pPr>
               <a:lnSpc>
                 <a:spcPts val="5519"/>
               </a:lnSpc>
@@ -7372,118 +9116,129 @@
                 <a:cs typeface="Times New Roman MT Bold"/>
                 <a:sym typeface="Times New Roman MT Bold"/>
               </a:rPr>
-              <a:t>2. Sentence Count &amp; Structure</a:t>
-            </a:r>
-          </a:p>
-          <a:p>
-            <a:pPr marL="863598" lvl="1" indent="-431799" algn="l">
+              <a:t>3.</a:t>
+            </a:r>
+            <a:r>
+              <a:rPr lang="en-GB" sz="3999" b="1" dirty="0">
+                <a:solidFill>
+                  <a:srgbClr val="FFFCF4"/>
+                </a:solidFill>
+                <a:latin typeface="Times New Roman MT"/>
+                <a:ea typeface="Times New Roman MT"/>
+                <a:cs typeface="Times New Roman MT"/>
+                <a:sym typeface="Times New Roman MT"/>
+              </a:rPr>
+              <a:t>Active Voice Sentences Count</a:t>
+            </a:r>
+          </a:p>
+          <a:p>
+            <a:pPr marL="571500" indent="-571500">
               <a:lnSpc>
                 <a:spcPts val="5519"/>
               </a:lnSpc>
-              <a:buFont typeface="Arial"/>
+              <a:buFont typeface="Arial" panose="020B0604020202020204" pitchFamily="34" charset="0"/>
               <a:buChar char="•"/>
             </a:pPr>
             <a:r>
-              <a:rPr lang="en-US" sz="3999" b="1" dirty="0">
-                <a:solidFill>
-                  <a:srgbClr val="FFFCF4"/>
-                </a:solidFill>
-                <a:latin typeface="Times New Roman MT Bold"/>
-                <a:ea typeface="Times New Roman MT Bold"/>
-                <a:cs typeface="Times New Roman MT Bold"/>
-                <a:sym typeface="Times New Roman MT Bold"/>
-              </a:rPr>
-              <a:t>AI:</a:t>
-            </a:r>
-          </a:p>
-          <a:p>
-            <a:pPr marL="431799" lvl="1" algn="l">
+              <a:rPr lang="en-GB" sz="3999" b="1" dirty="0">
+                <a:solidFill>
+                  <a:srgbClr val="FFFCF4"/>
+                </a:solidFill>
+                <a:latin typeface="Times New Roman MT"/>
+                <a:ea typeface="Times New Roman MT"/>
+                <a:cs typeface="Times New Roman MT"/>
+                <a:sym typeface="Times New Roman MT"/>
+              </a:rPr>
+              <a:t>Allam: 1.83, OpenAI: 1.32,Jais: 1.31, and </a:t>
+            </a:r>
+            <a:r>
+              <a:rPr lang="en-GB" sz="3999" b="1" dirty="0" err="1">
+                <a:solidFill>
+                  <a:srgbClr val="FFFCF4"/>
+                </a:solidFill>
+                <a:latin typeface="Times New Roman MT"/>
+                <a:ea typeface="Times New Roman MT"/>
+                <a:cs typeface="Times New Roman MT"/>
+                <a:sym typeface="Times New Roman MT"/>
+              </a:rPr>
+              <a:t>LLaMA</a:t>
+            </a:r>
+            <a:r>
+              <a:rPr lang="en-GB" sz="3999" b="1" dirty="0">
+                <a:solidFill>
+                  <a:srgbClr val="FFFCF4"/>
+                </a:solidFill>
+                <a:latin typeface="Times New Roman MT"/>
+                <a:ea typeface="Times New Roman MT"/>
+                <a:cs typeface="Times New Roman MT"/>
+                <a:sym typeface="Times New Roman MT"/>
+              </a:rPr>
+              <a:t>: 1.24. </a:t>
+            </a:r>
+          </a:p>
+          <a:p>
+            <a:pPr marL="571500" indent="-571500">
+              <a:lnSpc>
+                <a:spcPts val="5519"/>
+              </a:lnSpc>
+              <a:buFont typeface="Arial" panose="020B0604020202020204" pitchFamily="34" charset="0"/>
+              <a:buChar char="•"/>
+            </a:pPr>
+            <a:r>
+              <a:rPr lang="en-GB" sz="3999" b="1" dirty="0">
+                <a:solidFill>
+                  <a:srgbClr val="FFFCF4"/>
+                </a:solidFill>
+                <a:latin typeface="Times New Roman MT"/>
+                <a:ea typeface="Times New Roman MT"/>
+                <a:cs typeface="Times New Roman MT"/>
+                <a:sym typeface="Times New Roman MT"/>
+              </a:rPr>
+              <a:t>Original: 1.46.</a:t>
+            </a:r>
+          </a:p>
+          <a:p>
+            <a:pPr>
               <a:lnSpc>
                 <a:spcPts val="5519"/>
               </a:lnSpc>
             </a:pPr>
             <a:r>
-              <a:rPr lang="en-US" sz="3999" b="1" dirty="0">
-                <a:solidFill>
-                  <a:srgbClr val="FFFCF4"/>
-                </a:solidFill>
-                <a:latin typeface="Times New Roman MT Bold"/>
+              <a:rPr lang="en-US" sz="3600" b="1" dirty="0">
+                <a:solidFill>
+                  <a:srgbClr val="FFFCF4"/>
+                </a:solidFill>
+                <a:latin typeface="Times New Roman MT" panose="020B0604020202020204" charset="0"/>
                 <a:ea typeface="Times New Roman MT Bold"/>
                 <a:cs typeface="Times New Roman MT Bold"/>
                 <a:sym typeface="Times New Roman MT Bold"/>
               </a:rPr>
-              <a:t>Allam: 4.49, Jais: 5.91, </a:t>
-            </a:r>
-            <a:r>
-              <a:rPr lang="en-US" sz="3999" b="1" dirty="0" err="1">
-                <a:solidFill>
-                  <a:srgbClr val="FFFCF4"/>
-                </a:solidFill>
-                <a:latin typeface="Times New Roman MT Bold"/>
+              <a:t>Insight: </a:t>
+            </a:r>
+            <a:r>
+              <a:rPr lang="en-GB" sz="3600" b="1" dirty="0">
+                <a:solidFill>
+                  <a:srgbClr val="FFFCF4"/>
+                </a:solidFill>
+                <a:latin typeface="Times New Roman MT" panose="020B0604020202020204" charset="0"/>
                 <a:ea typeface="Times New Roman MT Bold"/>
                 <a:cs typeface="Times New Roman MT Bold"/>
                 <a:sym typeface="Times New Roman MT Bold"/>
               </a:rPr>
-              <a:t>LLaMA</a:t>
-            </a:r>
-            <a:r>
-              <a:rPr lang="en-US" sz="3999" b="1" dirty="0">
-                <a:solidFill>
-                  <a:srgbClr val="FFFCF4"/>
-                </a:solidFill>
-                <a:latin typeface="Times New Roman MT Bold"/>
-                <a:ea typeface="Times New Roman MT Bold"/>
-                <a:cs typeface="Times New Roman MT Bold"/>
-                <a:sym typeface="Times New Roman MT Bold"/>
-              </a:rPr>
-              <a:t>: 5.66, OpenAI: 6.50 sentences on average.</a:t>
-            </a:r>
-          </a:p>
-          <a:p>
-            <a:pPr marL="863598" lvl="1" indent="-431799" algn="l">
-              <a:lnSpc>
-                <a:spcPts val="5519"/>
-              </a:lnSpc>
-              <a:buFont typeface="Arial"/>
-              <a:buChar char="•"/>
-            </a:pPr>
-            <a:r>
-              <a:rPr lang="en-US" sz="3999" b="1" dirty="0">
-                <a:solidFill>
-                  <a:srgbClr val="FFFCF4"/>
-                </a:solidFill>
-                <a:latin typeface="Times New Roman MT Bold"/>
-                <a:ea typeface="Times New Roman MT Bold"/>
-                <a:cs typeface="Times New Roman MT Bold"/>
-                <a:sym typeface="Times New Roman MT Bold"/>
-              </a:rPr>
-              <a:t>Original: 7.43 sentences (longer and more complex).</a:t>
-            </a:r>
-          </a:p>
-          <a:p>
-            <a:pPr algn="l">
-              <a:lnSpc>
-                <a:spcPts val="5519"/>
-              </a:lnSpc>
-            </a:pPr>
-            <a:r>
-              <a:rPr lang="en-US" sz="3999" b="1" dirty="0">
-                <a:solidFill>
-                  <a:srgbClr val="FFFCF4"/>
-                </a:solidFill>
-                <a:latin typeface="Times New Roman MT Bold"/>
-                <a:ea typeface="Times New Roman MT Bold"/>
-                <a:cs typeface="Times New Roman MT Bold"/>
-                <a:sym typeface="Times New Roman MT Bold"/>
-              </a:rPr>
-              <a:t>Insight: Human texts are more segmented and syntactically rich; AI outputs are concise and dense.</a:t>
-            </a:r>
-          </a:p>
-        </p:txBody>
-      </p:sp>
-      <p:sp>
-        <p:nvSpPr>
-          <p:cNvPr id="9" name="AutoShape 9"/>
+              <a:t>Allam model has been trained to generate a style that is overtly direct and assertive , while the other LLMs gravitate toward a more passive voice style.</a:t>
+            </a:r>
+          </a:p>
+        </p:txBody>
+      </p:sp>
+      <p:sp>
+        <p:nvSpPr>
+          <p:cNvPr id="9" name="AutoShape 9">
+            <a:extLst>
+              <a:ext uri="{FF2B5EF4-FFF2-40B4-BE49-F238E27FC236}">
+                <a16:creationId xmlns:a16="http://schemas.microsoft.com/office/drawing/2014/main" id="{892D96E5-BB74-1DB6-4C03-647CE62A7CB4}"/>
+              </a:ext>
+            </a:extLst>
+          </p:cNvPr>
           <p:cNvSpPr/>
           <p:nvPr/>
         </p:nvSpPr>
@@ -7513,6 +9268,11 @@
         </p:txBody>
       </p:sp>
     </p:spTree>
+    <p:extLst>
+      <p:ext uri="{BB962C8B-B14F-4D97-AF65-F5344CB8AC3E}">
+        <p14:creationId xmlns:p14="http://schemas.microsoft.com/office/powerpoint/2010/main" val="2392212627"/>
+      </p:ext>
+    </p:extLst>
   </p:cSld>
   <p:clrMapOvr>
     <a:masterClrMapping/>
@@ -7520,7 +9280,7 @@
 </p:sld>
 </file>
 
-<file path=ppt/slides/slide7.xml><?xml version="1.0" encoding="utf-8"?>
+<file path=ppt/slides/slide8.xml><?xml version="1.0" encoding="utf-8"?>
 <p:sld xmlns:a="http://schemas.openxmlformats.org/drawingml/2006/main" xmlns:r="http://schemas.openxmlformats.org/officeDocument/2006/relationships" xmlns:p="http://schemas.openxmlformats.org/presentationml/2006/main">
   <p:cSld>
     <p:bg>
@@ -7536,7 +9296,7 @@
         <p:cNvPr id="1" name="">
           <a:extLst>
             <a:ext uri="{FF2B5EF4-FFF2-40B4-BE49-F238E27FC236}">
-              <a16:creationId xmlns:a16="http://schemas.microsoft.com/office/drawing/2014/main" id="{C36599C3-DD1C-AED6-0543-260C08933B48}"/>
+              <a16:creationId xmlns:a16="http://schemas.microsoft.com/office/drawing/2014/main" id="{A407A561-B9AF-156D-E4F9-D458A44FEBF2}"/>
             </a:ext>
           </a:extLst>
         </p:cNvPr>
@@ -7556,7 +9316,7 @@
           <p:cNvPr id="5" name="Freeform 5">
             <a:extLst>
               <a:ext uri="{FF2B5EF4-FFF2-40B4-BE49-F238E27FC236}">
-                <a16:creationId xmlns:a16="http://schemas.microsoft.com/office/drawing/2014/main" id="{419F7953-550B-5ABC-8564-E24BA10212CC}"/>
+                <a16:creationId xmlns:a16="http://schemas.microsoft.com/office/drawing/2014/main" id="{A9A5B33D-7B37-71CC-81B9-AE8752CDEBBB}"/>
               </a:ext>
             </a:extLst>
           </p:cNvPr>
@@ -7596,10 +9356,10 @@
             </a:pathLst>
           </a:custGeom>
           <a:blipFill>
-            <a:blip r:embed="rId2">
+            <a:blip r:embed="rId3">
               <a:extLst>
                 <a:ext uri="{96DAC541-7B7A-43D3-8B79-37D633B846F1}">
-                  <asvg:svgBlip xmlns:asvg="http://schemas.microsoft.com/office/drawing/2016/SVG/main" r:embed="rId3"/>
+                  <asvg:svgBlip xmlns:asvg="http://schemas.microsoft.com/office/drawing/2016/SVG/main" r:embed="rId4"/>
                 </a:ext>
               </a:extLst>
             </a:blip>
@@ -7621,7 +9381,7 @@
           <p:cNvPr id="6" name="AutoShape 6">
             <a:extLst>
               <a:ext uri="{FF2B5EF4-FFF2-40B4-BE49-F238E27FC236}">
-                <a16:creationId xmlns:a16="http://schemas.microsoft.com/office/drawing/2014/main" id="{793E0F95-1D95-14F1-80C4-C4E6DD900D09}"/>
+                <a16:creationId xmlns:a16="http://schemas.microsoft.com/office/drawing/2014/main" id="{946AEDA4-35D2-ED31-79C1-3F3F7B904CC9}"/>
               </a:ext>
             </a:extLst>
           </p:cNvPr>
@@ -7658,7 +9418,7 @@
           <p:cNvPr id="7" name="TextBox 7">
             <a:extLst>
               <a:ext uri="{FF2B5EF4-FFF2-40B4-BE49-F238E27FC236}">
-                <a16:creationId xmlns:a16="http://schemas.microsoft.com/office/drawing/2014/main" id="{EA5FB0B0-2E26-0011-3877-DB43E9DCAAAF}"/>
+                <a16:creationId xmlns:a16="http://schemas.microsoft.com/office/drawing/2014/main" id="{4D7F683D-BCE5-D47A-D68F-0F2643A6AB20}"/>
               </a:ext>
             </a:extLst>
           </p:cNvPr>
@@ -7708,7 +9468,7 @@
           <p:cNvPr id="8" name="TextBox 8">
             <a:extLst>
               <a:ext uri="{FF2B5EF4-FFF2-40B4-BE49-F238E27FC236}">
-                <a16:creationId xmlns:a16="http://schemas.microsoft.com/office/drawing/2014/main" id="{FEE118B6-BB4B-C694-2592-452A4223FFA0}"/>
+                <a16:creationId xmlns:a16="http://schemas.microsoft.com/office/drawing/2014/main" id="{4763D360-1BA9-9470-6D93-9778E3AB0BEA}"/>
               </a:ext>
             </a:extLst>
           </p:cNvPr>
@@ -7718,7 +9478,7 @@
         <p:spPr>
           <a:xfrm>
             <a:off x="1238171" y="2091105"/>
-            <a:ext cx="16619549" cy="8432629"/>
+            <a:ext cx="16619549" cy="4200702"/>
           </a:xfrm>
           <a:prstGeom prst="rect">
             <a:avLst/>
@@ -7731,200 +9491,6 @@
           <a:lstStyle/>
           <a:p>
             <a:pPr>
-              <a:lnSpc>
-                <a:spcPts val="5519"/>
-              </a:lnSpc>
-            </a:pPr>
-            <a:r>
-              <a:rPr lang="en-US" sz="3999" b="1" dirty="0">
-                <a:solidFill>
-                  <a:srgbClr val="FFFCF4"/>
-                </a:solidFill>
-                <a:latin typeface="Times New Roman MT Bold"/>
-                <a:ea typeface="Times New Roman MT Bold"/>
-                <a:cs typeface="Times New Roman MT Bold"/>
-                <a:sym typeface="Times New Roman MT Bold"/>
-              </a:rPr>
-              <a:t>3.</a:t>
-            </a:r>
-            <a:r>
-              <a:rPr lang="en-GB" sz="3999" b="1" dirty="0">
-                <a:solidFill>
-                  <a:srgbClr val="FFFCF4"/>
-                </a:solidFill>
-                <a:latin typeface="Times New Roman MT"/>
-                <a:ea typeface="Times New Roman MT"/>
-                <a:cs typeface="Times New Roman MT"/>
-                <a:sym typeface="Times New Roman MT"/>
-              </a:rPr>
-              <a:t>Active Voice Sentence Count</a:t>
-            </a:r>
-          </a:p>
-          <a:p>
-            <a:pPr marL="571500" indent="-571500">
-              <a:lnSpc>
-                <a:spcPts val="5519"/>
-              </a:lnSpc>
-              <a:buFont typeface="Arial" panose="020B0604020202020204" pitchFamily="34" charset="0"/>
-              <a:buChar char="•"/>
-            </a:pPr>
-            <a:r>
-              <a:rPr lang="en-GB" sz="3999" b="1" dirty="0">
-                <a:solidFill>
-                  <a:srgbClr val="FFFCF4"/>
-                </a:solidFill>
-                <a:latin typeface="Times New Roman MT"/>
-                <a:ea typeface="Times New Roman MT"/>
-                <a:cs typeface="Times New Roman MT"/>
-                <a:sym typeface="Times New Roman MT"/>
-              </a:rPr>
-              <a:t>Overall mean is 1.43</a:t>
-            </a:r>
-          </a:p>
-          <a:p>
-            <a:pPr marL="571500" indent="-571500">
-              <a:lnSpc>
-                <a:spcPts val="5519"/>
-              </a:lnSpc>
-              <a:buFont typeface="Arial" panose="020B0604020202020204" pitchFamily="34" charset="0"/>
-              <a:buChar char="•"/>
-            </a:pPr>
-            <a:r>
-              <a:rPr lang="en-GB" sz="3999" b="1" dirty="0">
-                <a:solidFill>
-                  <a:srgbClr val="FFFCF4"/>
-                </a:solidFill>
-                <a:latin typeface="Times New Roman MT"/>
-                <a:ea typeface="Times New Roman MT"/>
-                <a:cs typeface="Times New Roman MT"/>
-                <a:sym typeface="Times New Roman MT"/>
-              </a:rPr>
-              <a:t>Allam: 1.83, OpenAI: 1.32,Jais: 1.31, and </a:t>
-            </a:r>
-            <a:r>
-              <a:rPr lang="en-GB" sz="3999" b="1" dirty="0" err="1">
-                <a:solidFill>
-                  <a:srgbClr val="FFFCF4"/>
-                </a:solidFill>
-                <a:latin typeface="Times New Roman MT"/>
-                <a:ea typeface="Times New Roman MT"/>
-                <a:cs typeface="Times New Roman MT"/>
-                <a:sym typeface="Times New Roman MT"/>
-              </a:rPr>
-              <a:t>LLaMA</a:t>
-            </a:r>
-            <a:r>
-              <a:rPr lang="en-GB" sz="3999" b="1" dirty="0">
-                <a:solidFill>
-                  <a:srgbClr val="FFFCF4"/>
-                </a:solidFill>
-                <a:latin typeface="Times New Roman MT"/>
-                <a:ea typeface="Times New Roman MT"/>
-                <a:cs typeface="Times New Roman MT"/>
-                <a:sym typeface="Times New Roman MT"/>
-              </a:rPr>
-              <a:t>: 1.24. </a:t>
-            </a:r>
-          </a:p>
-          <a:p>
-            <a:pPr marL="571500" indent="-571500">
-              <a:lnSpc>
-                <a:spcPts val="5519"/>
-              </a:lnSpc>
-              <a:buFont typeface="Arial" panose="020B0604020202020204" pitchFamily="34" charset="0"/>
-              <a:buChar char="•"/>
-            </a:pPr>
-            <a:r>
-              <a:rPr lang="en-GB" sz="3999" b="1" dirty="0">
-                <a:solidFill>
-                  <a:srgbClr val="FFFCF4"/>
-                </a:solidFill>
-                <a:latin typeface="Times New Roman MT"/>
-                <a:ea typeface="Times New Roman MT"/>
-                <a:cs typeface="Times New Roman MT"/>
-                <a:sym typeface="Times New Roman MT"/>
-              </a:rPr>
-              <a:t>Original: 1.46.</a:t>
-            </a:r>
-          </a:p>
-          <a:p>
-            <a:pPr>
-              <a:lnSpc>
-                <a:spcPts val="5519"/>
-              </a:lnSpc>
-            </a:pPr>
-            <a:r>
-              <a:rPr lang="en-US" sz="3600" dirty="0">
-                <a:solidFill>
-                  <a:srgbClr val="FFFCF4"/>
-                </a:solidFill>
-                <a:latin typeface="Times New Roman MT" panose="020B0604020202020204" charset="0"/>
-                <a:ea typeface="Times New Roman MT Bold"/>
-                <a:cs typeface="Times New Roman MT Bold"/>
-                <a:sym typeface="Times New Roman MT Bold"/>
-              </a:rPr>
-              <a:t>Insight</a:t>
-            </a:r>
-            <a:r>
-              <a:rPr lang="en-US" sz="3600" b="1" dirty="0">
-                <a:solidFill>
-                  <a:srgbClr val="FFFCF4"/>
-                </a:solidFill>
-                <a:latin typeface="Times New Roman MT" panose="020B0604020202020204" charset="0"/>
-                <a:ea typeface="Times New Roman MT Bold"/>
-                <a:cs typeface="Times New Roman MT Bold"/>
-                <a:sym typeface="Times New Roman MT Bold"/>
-              </a:rPr>
-              <a:t>: </a:t>
-            </a:r>
-            <a:r>
-              <a:rPr lang="en-GB" sz="3600" dirty="0">
-                <a:solidFill>
-                  <a:srgbClr val="FFFCF4"/>
-                </a:solidFill>
-                <a:latin typeface="Times New Roman MT" panose="020B0604020202020204" charset="0"/>
-                <a:ea typeface="Times New Roman MT Bold"/>
-                <a:cs typeface="Times New Roman MT Bold"/>
-                <a:sym typeface="Times New Roman MT Bold"/>
-              </a:rPr>
-              <a:t>The writing style across the entire dataset leans more toward the passive voice rather than active </a:t>
-            </a:r>
-            <a:r>
-              <a:rPr lang="en-US" sz="3600" dirty="0">
-                <a:solidFill>
-                  <a:srgbClr val="FFFCF4"/>
-                </a:solidFill>
-                <a:latin typeface="Times New Roman MT" panose="020B0604020202020204" charset="0"/>
-                <a:ea typeface="Times New Roman MT Bold"/>
-                <a:cs typeface="Times New Roman MT Bold"/>
-                <a:sym typeface="Times New Roman MT Bold"/>
-              </a:rPr>
-              <a:t>voices where </a:t>
-            </a:r>
-            <a:r>
-              <a:rPr lang="en-GB" sz="3600" dirty="0">
-                <a:solidFill>
-                  <a:srgbClr val="FFFCF4"/>
-                </a:solidFill>
-                <a:latin typeface="Times New Roman MT" panose="020B0604020202020204" charset="0"/>
-                <a:ea typeface="Times New Roman MT Bold"/>
-                <a:cs typeface="Times New Roman MT Bold"/>
-                <a:sym typeface="Times New Roman MT Bold"/>
-              </a:rPr>
-              <a:t>the sentence uses a form of the verb.</a:t>
-            </a:r>
-            <a:endParaRPr lang="en-US" sz="3600" dirty="0">
-              <a:solidFill>
-                <a:srgbClr val="FFFCF4"/>
-              </a:solidFill>
-              <a:latin typeface="Times New Roman MT" panose="020B0604020202020204" charset="0"/>
-              <a:ea typeface="Times New Roman MT Bold"/>
-              <a:cs typeface="Times New Roman MT Bold"/>
-              <a:sym typeface="Times New Roman MT Bold"/>
-            </a:endParaRPr>
-          </a:p>
-          <a:p>
-            <a:pPr algn="l">
               <a:lnSpc>
                 <a:spcPts val="5519"/>
               </a:lnSpc>
@@ -8060,7 +9626,31 @@
                 <a:cs typeface="Times New Roman MT"/>
                 <a:sym typeface="Times New Roman MT"/>
               </a:rPr>
-              <a:t>Human writing often mixes Arabic with foreign symbols; AI-generated text remains purely Arabic.</a:t>
+              <a:t>Human and </a:t>
+            </a:r>
+            <a:r>
+              <a:rPr lang="en-US" sz="3600" dirty="0" err="1">
+                <a:solidFill>
+                  <a:srgbClr val="FFFCF4"/>
+                </a:solidFill>
+                <a:latin typeface="Times New Roman MT"/>
+                <a:ea typeface="Times New Roman MT"/>
+                <a:cs typeface="Times New Roman MT"/>
+                <a:sym typeface="Times New Roman MT"/>
+              </a:rPr>
+              <a:t>LLaMA</a:t>
+            </a:r>
+            <a:r>
+              <a:rPr lang="en-US" sz="3600" dirty="0">
+                <a:solidFill>
+                  <a:srgbClr val="FFFCF4"/>
+                </a:solidFill>
+                <a:latin typeface="Times New Roman MT"/>
+                <a:ea typeface="Times New Roman MT"/>
+                <a:cs typeface="Times New Roman MT"/>
+                <a:sym typeface="Times New Roman MT"/>
+              </a:rPr>
+              <a:t> writing often mixes Arabic with foreign symbols while other AI-generated text remained nearly pure Arabic.</a:t>
             </a:r>
           </a:p>
           <a:p>
@@ -8086,7 +9676,7 @@
           <p:cNvPr id="9" name="AutoShape 9">
             <a:extLst>
               <a:ext uri="{FF2B5EF4-FFF2-40B4-BE49-F238E27FC236}">
-                <a16:creationId xmlns:a16="http://schemas.microsoft.com/office/drawing/2014/main" id="{892D96E5-BB74-1DB6-4C03-647CE62A7CB4}"/>
+                <a16:creationId xmlns:a16="http://schemas.microsoft.com/office/drawing/2014/main" id="{B59C035E-5F44-C735-F7EF-ABB08B309564}"/>
               </a:ext>
             </a:extLst>
           </p:cNvPr>
@@ -8118,546 +9708,42 @@
           </a:p>
         </p:txBody>
       </p:sp>
-    </p:spTree>
-    <p:extLst>
-      <p:ext uri="{BB962C8B-B14F-4D97-AF65-F5344CB8AC3E}">
-        <p14:creationId xmlns:p14="http://schemas.microsoft.com/office/powerpoint/2010/main" val="2392212627"/>
-      </p:ext>
-    </p:extLst>
-  </p:cSld>
-  <p:clrMapOvr>
-    <a:masterClrMapping/>
-  </p:clrMapOvr>
-</p:sld>
-</file>
-
-<file path=ppt/slides/slide8.xml><?xml version="1.0" encoding="utf-8"?>
-<p:sld xmlns:a="http://schemas.openxmlformats.org/drawingml/2006/main" xmlns:r="http://schemas.openxmlformats.org/officeDocument/2006/relationships" xmlns:p="http://schemas.openxmlformats.org/presentationml/2006/main">
-  <p:cSld>
-    <p:bg>
-      <p:bgPr>
-        <a:solidFill>
-          <a:srgbClr val="435663"/>
-        </a:solidFill>
-        <a:effectLst/>
-      </p:bgPr>
-    </p:bg>
-    <p:spTree>
-      <p:nvGrpSpPr>
-        <p:cNvPr id="1" name=""/>
-        <p:cNvGrpSpPr/>
-        <p:nvPr/>
-      </p:nvGrpSpPr>
-      <p:grpSpPr>
-        <a:xfrm>
-          <a:off x="0" y="0"/>
-          <a:ext cx="0" cy="0"/>
-          <a:chOff x="0" y="0"/>
-          <a:chExt cx="0" cy="0"/>
-        </a:xfrm>
-      </p:grpSpPr>
-      <p:grpSp>
-        <p:nvGrpSpPr>
-          <p:cNvPr id="2" name="Group 2"/>
-          <p:cNvGrpSpPr/>
+      <p:pic>
+        <p:nvPicPr>
+          <p:cNvPr id="2" name="image21.png">
+            <a:extLst>
+              <a:ext uri="{FF2B5EF4-FFF2-40B4-BE49-F238E27FC236}">
+                <a16:creationId xmlns:a16="http://schemas.microsoft.com/office/drawing/2014/main" id="{A5CEA61B-4099-C6D9-6F3C-E62B77BE736B}"/>
+              </a:ext>
+            </a:extLst>
+          </p:cNvPr>
+          <p:cNvPicPr/>
           <p:nvPr/>
-        </p:nvGrpSpPr>
-        <p:grpSpPr>
-          <a:xfrm>
-            <a:off x="10453432" y="1810096"/>
-            <a:ext cx="11584761" cy="11584761"/>
-            <a:chOff x="0" y="0"/>
-            <a:chExt cx="812800" cy="812800"/>
-          </a:xfrm>
-        </p:grpSpPr>
-        <p:sp>
-          <p:nvSpPr>
-            <p:cNvPr id="3" name="Freeform 3"/>
-            <p:cNvSpPr/>
-            <p:nvPr/>
-          </p:nvSpPr>
-          <p:spPr>
-            <a:xfrm>
-              <a:off x="0" y="0"/>
-              <a:ext cx="812800" cy="812800"/>
-            </a:xfrm>
-            <a:custGeom>
-              <a:avLst/>
-              <a:gdLst/>
-              <a:ahLst/>
-              <a:cxnLst/>
-              <a:rect l="l" t="t" r="r" b="b"/>
-              <a:pathLst>
-                <a:path w="812800" h="812800">
-                  <a:moveTo>
-                    <a:pt x="406400" y="0"/>
-                  </a:moveTo>
-                  <a:cubicBezTo>
-                    <a:pt x="181951" y="0"/>
-                    <a:pt x="0" y="181951"/>
-                    <a:pt x="0" y="406400"/>
-                  </a:cubicBezTo>
-                  <a:cubicBezTo>
-                    <a:pt x="0" y="630849"/>
-                    <a:pt x="181951" y="812800"/>
-                    <a:pt x="406400" y="812800"/>
-                  </a:cubicBezTo>
-                  <a:cubicBezTo>
-                    <a:pt x="630849" y="812800"/>
-                    <a:pt x="812800" y="630849"/>
-                    <a:pt x="812800" y="406400"/>
-                  </a:cubicBezTo>
-                  <a:cubicBezTo>
-                    <a:pt x="812800" y="181951"/>
-                    <a:pt x="630849" y="0"/>
-                    <a:pt x="406400" y="0"/>
-                  </a:cubicBezTo>
-                  <a:close/>
-                </a:path>
-              </a:pathLst>
-            </a:custGeom>
-            <a:solidFill>
-              <a:srgbClr val="489B9F">
-                <a:alpha val="3922"/>
-              </a:srgbClr>
-            </a:solidFill>
-          </p:spPr>
-          <p:txBody>
-            <a:bodyPr/>
-            <a:lstStyle/>
-            <a:p>
-              <a:endParaRPr lang="en-US"/>
-            </a:p>
-          </p:txBody>
-        </p:sp>
-        <p:sp>
-          <p:nvSpPr>
-            <p:cNvPr id="4" name="TextBox 4"/>
-            <p:cNvSpPr txBox="1"/>
-            <p:nvPr/>
-          </p:nvSpPr>
-          <p:spPr>
-            <a:xfrm>
-              <a:off x="76200" y="76200"/>
-              <a:ext cx="660400" cy="660400"/>
-            </a:xfrm>
-            <a:prstGeom prst="rect">
-              <a:avLst/>
-            </a:prstGeom>
-          </p:spPr>
-          <p:txBody>
-            <a:bodyPr lIns="50800" tIns="50800" rIns="50800" bIns="50800" rtlCol="0" anchor="ctr"/>
-            <a:lstStyle/>
-            <a:p>
-              <a:pPr marL="0" lvl="0" indent="0" algn="l">
-                <a:lnSpc>
-                  <a:spcPts val="2879"/>
-                </a:lnSpc>
-                <a:spcBef>
-                  <a:spcPct val="0"/>
-                </a:spcBef>
-              </a:pPr>
-              <a:endParaRPr/>
-            </a:p>
-          </p:txBody>
-        </p:sp>
-      </p:grpSp>
-      <p:sp>
-        <p:nvSpPr>
-          <p:cNvPr id="5" name="Freeform 5"/>
-          <p:cNvSpPr/>
-          <p:nvPr/>
-        </p:nvSpPr>
+        </p:nvPicPr>
+        <p:blipFill>
+          <a:blip r:embed="rId5"/>
+          <a:srcRect r="865"/>
+          <a:stretch>
+            <a:fillRect/>
+          </a:stretch>
+        </p:blipFill>
         <p:spPr>
           <a:xfrm>
-            <a:off x="16245812" y="1303350"/>
-            <a:ext cx="922084" cy="230521"/>
-          </a:xfrm>
-          <a:custGeom>
-            <a:avLst/>
-            <a:gdLst/>
-            <a:ahLst/>
-            <a:cxnLst/>
-            <a:rect l="l" t="t" r="r" b="b"/>
-            <a:pathLst>
-              <a:path w="922084" h="230521">
-                <a:moveTo>
-                  <a:pt x="0" y="0"/>
-                </a:moveTo>
-                <a:lnTo>
-                  <a:pt x="922084" y="0"/>
-                </a:lnTo>
-                <a:lnTo>
-                  <a:pt x="922084" y="230521"/>
-                </a:lnTo>
-                <a:lnTo>
-                  <a:pt x="0" y="230521"/>
-                </a:lnTo>
-                <a:lnTo>
-                  <a:pt x="0" y="0"/>
-                </a:lnTo>
-                <a:close/>
-              </a:path>
-            </a:pathLst>
-          </a:custGeom>
-          <a:blipFill>
-            <a:blip r:embed="rId2">
-              <a:extLst>
-                <a:ext uri="{96DAC541-7B7A-43D3-8B79-37D633B846F1}">
-                  <asvg:svgBlip xmlns:asvg="http://schemas.microsoft.com/office/drawing/2016/SVG/main" r:embed="rId3"/>
-                </a:ext>
-              </a:extLst>
-            </a:blip>
-            <a:stretch>
-              <a:fillRect/>
-            </a:stretch>
-          </a:blipFill>
-        </p:spPr>
-        <p:txBody>
-          <a:bodyPr/>
-          <a:lstStyle/>
-          <a:p>
-            <a:endParaRPr lang="en-US"/>
-          </a:p>
-        </p:txBody>
-      </p:sp>
-      <p:sp>
-        <p:nvSpPr>
-          <p:cNvPr id="6" name="AutoShape 6"/>
-          <p:cNvSpPr/>
-          <p:nvPr/>
-        </p:nvSpPr>
-        <p:spPr>
-          <a:xfrm flipV="1">
-            <a:off x="1028700" y="9451369"/>
-            <a:ext cx="16139196" cy="9525"/>
-          </a:xfrm>
-          <a:prstGeom prst="line">
-            <a:avLst/>
-          </a:prstGeom>
-          <a:ln w="66675" cap="flat">
-            <a:solidFill>
-              <a:srgbClr val="FFFCF4"/>
-            </a:solidFill>
-            <a:prstDash val="solid"/>
-            <a:headEnd type="none" w="sm" len="sm"/>
-            <a:tailEnd type="none" w="sm" len="sm"/>
-          </a:ln>
-        </p:spPr>
-        <p:txBody>
-          <a:bodyPr/>
-          <a:lstStyle/>
-          <a:p>
-            <a:endParaRPr lang="en-US"/>
-          </a:p>
-        </p:txBody>
-      </p:sp>
-      <p:sp>
-        <p:nvSpPr>
-          <p:cNvPr id="7" name="TextBox 7"/>
-          <p:cNvSpPr txBox="1"/>
-          <p:nvPr/>
-        </p:nvSpPr>
-        <p:spPr>
-          <a:xfrm>
-            <a:off x="1028700" y="1354429"/>
-            <a:ext cx="12953291" cy="847767"/>
+            <a:off x="6188869" y="5753100"/>
+            <a:ext cx="5910262" cy="3806508"/>
           </a:xfrm>
           <a:prstGeom prst="rect">
             <a:avLst/>
           </a:prstGeom>
+          <a:ln/>
         </p:spPr>
-        <p:txBody>
-          <a:bodyPr lIns="0" tIns="0" rIns="0" bIns="0" rtlCol="0" anchor="t">
-            <a:spAutoFit/>
-          </a:bodyPr>
-          <a:lstStyle/>
-          <a:p>
-            <a:pPr marL="0" lvl="0" indent="0" algn="l">
-              <a:lnSpc>
-                <a:spcPts val="5999"/>
-              </a:lnSpc>
-              <a:spcBef>
-                <a:spcPct val="0"/>
-              </a:spcBef>
-            </a:pPr>
-            <a:r>
-              <a:rPr lang="en-US" sz="4999" b="1" spc="-149">
-                <a:solidFill>
-                  <a:srgbClr val="FFFCF4"/>
-                </a:solidFill>
-                <a:latin typeface="Times New Roman MT Bold"/>
-                <a:ea typeface="Times New Roman MT Bold"/>
-                <a:cs typeface="Times New Roman MT Bold"/>
-                <a:sym typeface="Times New Roman MT Bold"/>
-              </a:rPr>
-              <a:t> Feature Engineering Con’t</a:t>
-            </a:r>
-          </a:p>
-        </p:txBody>
-      </p:sp>
-      <p:sp>
-        <p:nvSpPr>
-          <p:cNvPr id="8" name="TextBox 8"/>
-          <p:cNvSpPr txBox="1"/>
-          <p:nvPr/>
-        </p:nvSpPr>
-        <p:spPr>
-          <a:xfrm>
-            <a:off x="1209675" y="2376509"/>
-            <a:ext cx="16363083" cy="6318696"/>
-          </a:xfrm>
-          <a:prstGeom prst="rect">
-            <a:avLst/>
-          </a:prstGeom>
-        </p:spPr>
-        <p:txBody>
-          <a:bodyPr lIns="0" tIns="0" rIns="0" bIns="0" rtlCol="0" anchor="t">
-            <a:spAutoFit/>
-          </a:bodyPr>
-          <a:lstStyle/>
-          <a:p>
-            <a:pPr algn="l">
-              <a:lnSpc>
-                <a:spcPts val="5519"/>
-              </a:lnSpc>
-            </a:pPr>
-            <a:r>
-              <a:rPr lang="en-US" sz="3999" b="1" dirty="0">
-                <a:solidFill>
-                  <a:srgbClr val="FFFCF4"/>
-                </a:solidFill>
-                <a:latin typeface="Times New Roman MT Bold"/>
-                <a:ea typeface="Times New Roman MT Bold"/>
-                <a:cs typeface="Times New Roman MT Bold"/>
-                <a:sym typeface="Times New Roman MT Bold"/>
-              </a:rPr>
-              <a:t>5. Redundancy Score</a:t>
-            </a:r>
-          </a:p>
-          <a:p>
-            <a:pPr marL="863599" lvl="1" indent="-431800" algn="l">
-              <a:lnSpc>
-                <a:spcPts val="5519"/>
-              </a:lnSpc>
-              <a:buFont typeface="Arial"/>
-              <a:buChar char="•"/>
-            </a:pPr>
-            <a:r>
-              <a:rPr lang="en-US" sz="3999" b="1" dirty="0">
-                <a:solidFill>
-                  <a:srgbClr val="FFFCF4"/>
-                </a:solidFill>
-                <a:latin typeface="Times New Roman MT Bold"/>
-                <a:ea typeface="Times New Roman MT Bold"/>
-                <a:cs typeface="Times New Roman MT Bold"/>
-                <a:sym typeface="Times New Roman MT Bold"/>
-              </a:rPr>
-              <a:t>AI: Allam: 0.56, </a:t>
-            </a:r>
-            <a:r>
-              <a:rPr lang="en-US" sz="3999" b="1" dirty="0" err="1">
-                <a:solidFill>
-                  <a:srgbClr val="FFFCF4"/>
-                </a:solidFill>
-                <a:latin typeface="Times New Roman MT Bold"/>
-                <a:ea typeface="Times New Roman MT Bold"/>
-                <a:cs typeface="Times New Roman MT Bold"/>
-                <a:sym typeface="Times New Roman MT Bold"/>
-              </a:rPr>
-              <a:t>LLaMA</a:t>
-            </a:r>
-            <a:r>
-              <a:rPr lang="en-US" sz="3999" b="1" dirty="0">
-                <a:solidFill>
-                  <a:srgbClr val="FFFCF4"/>
-                </a:solidFill>
-                <a:latin typeface="Times New Roman MT Bold"/>
-                <a:ea typeface="Times New Roman MT Bold"/>
-                <a:cs typeface="Times New Roman MT Bold"/>
-                <a:sym typeface="Times New Roman MT Bold"/>
-              </a:rPr>
-              <a:t>: 0.55, Jais: 0.54, OpenAI: 0.52.</a:t>
-            </a:r>
-          </a:p>
-          <a:p>
-            <a:pPr marL="863599" lvl="1" indent="-431800" algn="l">
-              <a:lnSpc>
-                <a:spcPts val="5519"/>
-              </a:lnSpc>
-              <a:buFont typeface="Arial"/>
-              <a:buChar char="•"/>
-            </a:pPr>
-            <a:r>
-              <a:rPr lang="en-US" sz="3999" b="1" dirty="0">
-                <a:solidFill>
-                  <a:srgbClr val="FFFCF4"/>
-                </a:solidFill>
-                <a:latin typeface="Times New Roman MT Bold"/>
-                <a:ea typeface="Times New Roman MT Bold"/>
-                <a:cs typeface="Times New Roman MT Bold"/>
-                <a:sym typeface="Times New Roman MT Bold"/>
-              </a:rPr>
-              <a:t>Original: 0.39 (much lower repetition).</a:t>
-            </a:r>
-          </a:p>
-          <a:p>
-            <a:pPr algn="l">
-              <a:lnSpc>
-                <a:spcPts val="5519"/>
-              </a:lnSpc>
-            </a:pPr>
-            <a:r>
-              <a:rPr lang="en-US" sz="3999" b="1" dirty="0">
-                <a:solidFill>
-                  <a:srgbClr val="FFFCF4"/>
-                </a:solidFill>
-                <a:latin typeface="Times New Roman MT Bold"/>
-                <a:ea typeface="Times New Roman MT Bold"/>
-                <a:cs typeface="Times New Roman MT Bold"/>
-                <a:sym typeface="Times New Roman MT Bold"/>
-              </a:rPr>
-              <a:t>Insight: AI-generated abstracts are more repetitive and template-like; human writing is diverse and context-driven.</a:t>
-            </a:r>
-          </a:p>
-          <a:p>
-            <a:pPr algn="l">
-              <a:lnSpc>
-                <a:spcPts val="5519"/>
-              </a:lnSpc>
-            </a:pPr>
-            <a:r>
-              <a:rPr lang="en-US" sz="3999" b="1" dirty="0">
-                <a:solidFill>
-                  <a:srgbClr val="FFFCF4"/>
-                </a:solidFill>
-                <a:latin typeface="Times New Roman MT Bold"/>
-                <a:ea typeface="Times New Roman MT Bold"/>
-                <a:cs typeface="Times New Roman MT Bold"/>
-                <a:sym typeface="Times New Roman MT Bold"/>
-              </a:rPr>
-              <a:t>6. Vocabulary Richness (TTR)</a:t>
-            </a:r>
-          </a:p>
-          <a:p>
-            <a:pPr marL="863599" lvl="1" indent="-431800" algn="l">
-              <a:lnSpc>
-                <a:spcPts val="5519"/>
-              </a:lnSpc>
-              <a:buFont typeface="Arial"/>
-              <a:buChar char="•"/>
-            </a:pPr>
-            <a:r>
-              <a:rPr lang="en-US" sz="3999" b="1" dirty="0">
-                <a:solidFill>
-                  <a:srgbClr val="FFFCF4"/>
-                </a:solidFill>
-                <a:latin typeface="Times New Roman MT Bold"/>
-                <a:ea typeface="Times New Roman MT Bold"/>
-                <a:cs typeface="Times New Roman MT Bold"/>
-                <a:sym typeface="Times New Roman MT Bold"/>
-              </a:rPr>
-              <a:t>AI</a:t>
-            </a:r>
-            <a:r>
-              <a:rPr lang="en-US" sz="3999" dirty="0">
-                <a:solidFill>
-                  <a:srgbClr val="FFFCF4"/>
-                </a:solidFill>
-                <a:latin typeface="Times New Roman MT"/>
-                <a:ea typeface="Times New Roman MT"/>
-                <a:cs typeface="Times New Roman MT"/>
-                <a:sym typeface="Times New Roman MT"/>
-              </a:rPr>
-              <a:t>: 0.70–0.79 range.</a:t>
-            </a:r>
-          </a:p>
-          <a:p>
-            <a:pPr marL="863599" lvl="1" indent="-431800" algn="l">
-              <a:lnSpc>
-                <a:spcPts val="5519"/>
-              </a:lnSpc>
-              <a:buFont typeface="Arial"/>
-              <a:buChar char="•"/>
-            </a:pPr>
-            <a:r>
-              <a:rPr lang="en-US" sz="3999" b="1" dirty="0">
-                <a:solidFill>
-                  <a:srgbClr val="FFFCF4"/>
-                </a:solidFill>
-                <a:latin typeface="Times New Roman MT Bold"/>
-                <a:ea typeface="Times New Roman MT Bold"/>
-                <a:cs typeface="Times New Roman MT Bold"/>
-                <a:sym typeface="Times New Roman MT Bold"/>
-              </a:rPr>
-              <a:t>Original</a:t>
-            </a:r>
-            <a:r>
-              <a:rPr lang="en-US" sz="3999" dirty="0">
-                <a:solidFill>
-                  <a:srgbClr val="FFFCF4"/>
-                </a:solidFill>
-                <a:latin typeface="Times New Roman MT"/>
-                <a:ea typeface="Times New Roman MT"/>
-                <a:cs typeface="Times New Roman MT"/>
-                <a:sym typeface="Times New Roman MT"/>
-              </a:rPr>
-              <a:t>: 0.798 (highest diversity).</a:t>
-            </a:r>
-          </a:p>
-          <a:p>
-            <a:pPr algn="l">
-              <a:lnSpc>
-                <a:spcPts val="5519"/>
-              </a:lnSpc>
-            </a:pPr>
-            <a:r>
-              <a:rPr lang="en-US" sz="3999" dirty="0">
-                <a:solidFill>
-                  <a:srgbClr val="FFFCF4"/>
-                </a:solidFill>
-                <a:latin typeface="Times New Roman MT"/>
-                <a:ea typeface="Times New Roman MT"/>
-                <a:cs typeface="Times New Roman MT"/>
-                <a:sym typeface="Times New Roman MT"/>
-              </a:rPr>
-              <a:t>Insight: Human abstracts use a broader and more varied vocabulary.</a:t>
-            </a:r>
-          </a:p>
-        </p:txBody>
-      </p:sp>
-      <p:sp>
-        <p:nvSpPr>
-          <p:cNvPr id="9" name="AutoShape 9"/>
-          <p:cNvSpPr/>
-          <p:nvPr/>
-        </p:nvSpPr>
-        <p:spPr>
-          <a:xfrm flipV="1">
-            <a:off x="1028700" y="1019175"/>
-            <a:ext cx="16139196" cy="9525"/>
-          </a:xfrm>
-          <a:prstGeom prst="line">
-            <a:avLst/>
-          </a:prstGeom>
-          <a:ln w="66675" cap="flat">
-            <a:solidFill>
-              <a:srgbClr val="FFFCF4"/>
-            </a:solidFill>
-            <a:prstDash val="solid"/>
-            <a:headEnd type="none" w="sm" len="sm"/>
-            <a:tailEnd type="none" w="sm" len="sm"/>
-          </a:ln>
-        </p:spPr>
-        <p:txBody>
-          <a:bodyPr/>
-          <a:lstStyle/>
-          <a:p>
-            <a:endParaRPr lang="en-US"/>
-          </a:p>
-        </p:txBody>
-      </p:sp>
+      </p:pic>
     </p:spTree>
+    <p:extLst>
+      <p:ext uri="{BB962C8B-B14F-4D97-AF65-F5344CB8AC3E}">
+        <p14:creationId xmlns:p14="http://schemas.microsoft.com/office/powerpoint/2010/main" val="2574753448"/>
+      </p:ext>
+    </p:extLst>
   </p:cSld>
   <p:clrMapOvr>
     <a:masterClrMapping/>
@@ -8863,7 +9949,7 @@
         </p:nvSpPr>
         <p:spPr>
           <a:xfrm flipV="1">
-            <a:off x="1028700" y="9621574"/>
+            <a:off x="1028700" y="9451369"/>
             <a:ext cx="16139196" cy="9525"/>
           </a:xfrm>
           <a:prstGeom prst="line">
@@ -8888,119 +9974,13 @@
       </p:sp>
       <p:sp>
         <p:nvSpPr>
-          <p:cNvPr id="7" name="Freeform 7"/>
-          <p:cNvSpPr/>
+          <p:cNvPr id="7" name="TextBox 7"/>
+          <p:cNvSpPr txBox="1"/>
           <p:nvPr/>
         </p:nvSpPr>
         <p:spPr>
           <a:xfrm>
-            <a:off x="14295449" y="5510401"/>
-            <a:ext cx="3674745" cy="2953825"/>
-          </a:xfrm>
-          <a:custGeom>
-            <a:avLst/>
-            <a:gdLst/>
-            <a:ahLst/>
-            <a:cxnLst/>
-            <a:rect l="l" t="t" r="r" b="b"/>
-            <a:pathLst>
-              <a:path w="3674745" h="2953825">
-                <a:moveTo>
-                  <a:pt x="0" y="0"/>
-                </a:moveTo>
-                <a:lnTo>
-                  <a:pt x="3674745" y="0"/>
-                </a:lnTo>
-                <a:lnTo>
-                  <a:pt x="3674745" y="2953824"/>
-                </a:lnTo>
-                <a:lnTo>
-                  <a:pt x="0" y="2953824"/>
-                </a:lnTo>
-                <a:lnTo>
-                  <a:pt x="0" y="0"/>
-                </a:lnTo>
-                <a:close/>
-              </a:path>
-            </a:pathLst>
-          </a:custGeom>
-          <a:blipFill>
-            <a:blip r:embed="rId4"/>
-            <a:stretch>
-              <a:fillRect l="-20478" r="-4181"/>
-            </a:stretch>
-          </a:blipFill>
-        </p:spPr>
-        <p:txBody>
-          <a:bodyPr/>
-          <a:lstStyle/>
-          <a:p>
-            <a:endParaRPr lang="en-US"/>
-          </a:p>
-        </p:txBody>
-      </p:sp>
-      <p:sp>
-        <p:nvSpPr>
-          <p:cNvPr id="8" name="Freeform 8"/>
-          <p:cNvSpPr/>
-          <p:nvPr/>
-        </p:nvSpPr>
-        <p:spPr>
-          <a:xfrm>
-            <a:off x="14295449" y="2125276"/>
-            <a:ext cx="3674745" cy="3018224"/>
-          </a:xfrm>
-          <a:custGeom>
-            <a:avLst/>
-            <a:gdLst/>
-            <a:ahLst/>
-            <a:cxnLst/>
-            <a:rect l="l" t="t" r="r" b="b"/>
-            <a:pathLst>
-              <a:path w="3674745" h="3018224">
-                <a:moveTo>
-                  <a:pt x="0" y="0"/>
-                </a:moveTo>
-                <a:lnTo>
-                  <a:pt x="3674745" y="0"/>
-                </a:lnTo>
-                <a:lnTo>
-                  <a:pt x="3674745" y="3018224"/>
-                </a:lnTo>
-                <a:lnTo>
-                  <a:pt x="0" y="3018224"/>
-                </a:lnTo>
-                <a:lnTo>
-                  <a:pt x="0" y="0"/>
-                </a:lnTo>
-                <a:close/>
-              </a:path>
-            </a:pathLst>
-          </a:custGeom>
-          <a:blipFill>
-            <a:blip r:embed="rId5"/>
-            <a:stretch>
-              <a:fillRect l="-20243" r="-4001"/>
-            </a:stretch>
-          </a:blipFill>
-        </p:spPr>
-        <p:txBody>
-          <a:bodyPr/>
-          <a:lstStyle/>
-          <a:p>
-            <a:endParaRPr lang="en-US"/>
-          </a:p>
-        </p:txBody>
-      </p:sp>
-      <p:sp>
-        <p:nvSpPr>
-          <p:cNvPr id="9" name="TextBox 9"/>
-          <p:cNvSpPr txBox="1"/>
-          <p:nvPr/>
-        </p:nvSpPr>
-        <p:spPr>
-          <a:xfrm>
-            <a:off x="1028700" y="1160475"/>
+            <a:off x="1028700" y="1354429"/>
             <a:ext cx="12953291" cy="847767"/>
           </a:xfrm>
           <a:prstGeom prst="rect">
@@ -9031,21 +10011,21 @@
                 <a:cs typeface="Times New Roman MT Bold"/>
                 <a:sym typeface="Times New Roman MT Bold"/>
               </a:rPr>
-              <a:t>Embeddings &amp; Data Splitting</a:t>
-            </a:r>
-          </a:p>
-        </p:txBody>
-      </p:sp>
-      <p:sp>
-        <p:nvSpPr>
-          <p:cNvPr id="10" name="TextBox 10"/>
+              <a:t> Feature Engineering Con’t</a:t>
+            </a:r>
+          </a:p>
+        </p:txBody>
+      </p:sp>
+      <p:sp>
+        <p:nvSpPr>
+          <p:cNvPr id="8" name="TextBox 8"/>
           <p:cNvSpPr txBox="1"/>
           <p:nvPr/>
         </p:nvSpPr>
         <p:spPr>
           <a:xfrm>
-            <a:off x="857723" y="1972876"/>
-            <a:ext cx="13437726" cy="7310986"/>
+            <a:off x="1209675" y="2376509"/>
+            <a:ext cx="16363083" cy="6316666"/>
           </a:xfrm>
           <a:prstGeom prst="rect">
             <a:avLst/>
@@ -9059,11 +10039,11 @@
           <a:p>
             <a:pPr algn="l">
               <a:lnSpc>
-                <a:spcPts val="4911"/>
+                <a:spcPts val="5519"/>
               </a:lnSpc>
             </a:pPr>
             <a:r>
-              <a:rPr lang="en-US" sz="3559" b="1">
+              <a:rPr lang="en-US" sz="3999" b="1" dirty="0">
                 <a:solidFill>
                   <a:srgbClr val="FFFCF4"/>
                 </a:solidFill>
@@ -9072,19 +10052,159 @@
                 <a:cs typeface="Times New Roman MT Bold"/>
                 <a:sym typeface="Times New Roman MT Bold"/>
               </a:rPr>
-              <a:t>TF-IDF (Term Frequency–Inverse Document Frequency)</a:t>
-            </a:r>
-          </a:p>
-          <a:p>
-            <a:pPr marL="746879" lvl="1" indent="-373440" algn="l">
+              <a:t>5. Redundancy Score</a:t>
+            </a:r>
+          </a:p>
+          <a:p>
+            <a:pPr marL="863599" lvl="1" indent="-431800" algn="l">
               <a:lnSpc>
-                <a:spcPts val="4773"/>
+                <a:spcPts val="5519"/>
               </a:lnSpc>
               <a:buFont typeface="Arial"/>
               <a:buChar char="•"/>
             </a:pPr>
             <a:r>
-              <a:rPr lang="en-US" sz="3459">
+              <a:rPr lang="en-US" sz="3999" dirty="0">
+                <a:solidFill>
+                  <a:srgbClr val="FFFCF4"/>
+                </a:solidFill>
+                <a:latin typeface="Times New Roman MT" panose="020B0604020202020204" charset="0"/>
+                <a:ea typeface="Times New Roman MT Bold"/>
+                <a:cs typeface="Times New Roman MT Bold"/>
+                <a:sym typeface="Times New Roman MT Bold"/>
+              </a:rPr>
+              <a:t>AI: Allam: 0.56, </a:t>
+            </a:r>
+            <a:r>
+              <a:rPr lang="en-US" sz="3999" dirty="0" err="1">
+                <a:solidFill>
+                  <a:srgbClr val="FFFCF4"/>
+                </a:solidFill>
+                <a:latin typeface="Times New Roman MT" panose="020B0604020202020204" charset="0"/>
+                <a:ea typeface="Times New Roman MT Bold"/>
+                <a:cs typeface="Times New Roman MT Bold"/>
+                <a:sym typeface="Times New Roman MT Bold"/>
+              </a:rPr>
+              <a:t>LLaMA</a:t>
+            </a:r>
+            <a:r>
+              <a:rPr lang="en-US" sz="3999" dirty="0">
+                <a:solidFill>
+                  <a:srgbClr val="FFFCF4"/>
+                </a:solidFill>
+                <a:latin typeface="Times New Roman MT" panose="020B0604020202020204" charset="0"/>
+                <a:ea typeface="Times New Roman MT Bold"/>
+                <a:cs typeface="Times New Roman MT Bold"/>
+                <a:sym typeface="Times New Roman MT Bold"/>
+              </a:rPr>
+              <a:t>: 0.55, Jais: 0.54, OpenAI: 0.52.</a:t>
+            </a:r>
+          </a:p>
+          <a:p>
+            <a:pPr marL="863599" lvl="1" indent="-431800" algn="l">
+              <a:lnSpc>
+                <a:spcPts val="5519"/>
+              </a:lnSpc>
+              <a:buFont typeface="Arial"/>
+              <a:buChar char="•"/>
+            </a:pPr>
+            <a:r>
+              <a:rPr lang="en-US" sz="3999" dirty="0">
+                <a:solidFill>
+                  <a:srgbClr val="FFFCF4"/>
+                </a:solidFill>
+                <a:latin typeface="Times New Roman MT" panose="020B0604020202020204" charset="0"/>
+                <a:ea typeface="Times New Roman MT Bold"/>
+                <a:cs typeface="Times New Roman MT Bold"/>
+                <a:sym typeface="Times New Roman MT Bold"/>
+              </a:rPr>
+              <a:t>Original: 0.39 (much lower repetition).</a:t>
+            </a:r>
+          </a:p>
+          <a:p>
+            <a:pPr algn="l">
+              <a:lnSpc>
+                <a:spcPts val="5519"/>
+              </a:lnSpc>
+            </a:pPr>
+            <a:r>
+              <a:rPr lang="en-US" sz="3999" b="1" dirty="0">
+                <a:solidFill>
+                  <a:srgbClr val="FFFCF4"/>
+                </a:solidFill>
+                <a:latin typeface="Times New Roman MT Bold"/>
+                <a:ea typeface="Times New Roman MT Bold"/>
+                <a:cs typeface="Times New Roman MT Bold"/>
+                <a:sym typeface="Times New Roman MT Bold"/>
+              </a:rPr>
+              <a:t>Insight: AI-generated abstracts are more repetitive and template-like and human writing is diverse and context-driven.</a:t>
+            </a:r>
+          </a:p>
+          <a:p>
+            <a:pPr algn="l">
+              <a:lnSpc>
+                <a:spcPts val="5519"/>
+              </a:lnSpc>
+            </a:pPr>
+            <a:r>
+              <a:rPr lang="en-US" sz="3999" b="1" dirty="0">
+                <a:solidFill>
+                  <a:srgbClr val="FFFCF4"/>
+                </a:solidFill>
+                <a:latin typeface="Times New Roman MT Bold"/>
+                <a:ea typeface="Times New Roman MT Bold"/>
+                <a:cs typeface="Times New Roman MT Bold"/>
+                <a:sym typeface="Times New Roman MT Bold"/>
+              </a:rPr>
+              <a:t>6. Vocabulary Richness was </a:t>
+            </a:r>
+            <a:r>
+              <a:rPr lang="en-GB" sz="3999" b="1" dirty="0">
+                <a:solidFill>
+                  <a:srgbClr val="FFFCF4"/>
+                </a:solidFill>
+                <a:latin typeface="Times New Roman MT Bold"/>
+                <a:ea typeface="Times New Roman MT Bold"/>
+                <a:cs typeface="Times New Roman MT Bold"/>
+                <a:sym typeface="Times New Roman MT Bold"/>
+              </a:rPr>
+              <a:t>measured by the Type-Token Ratio (TTR)</a:t>
+            </a:r>
+            <a:r>
+              <a:rPr lang="en-US" sz="3999" b="1" dirty="0">
+                <a:solidFill>
+                  <a:srgbClr val="FFFCF4"/>
+                </a:solidFill>
+                <a:latin typeface="Times New Roman MT Bold"/>
+                <a:ea typeface="Times New Roman MT Bold"/>
+                <a:cs typeface="Times New Roman MT Bold"/>
+                <a:sym typeface="Times New Roman MT Bold"/>
+              </a:rPr>
+              <a:t> </a:t>
+            </a:r>
+          </a:p>
+          <a:p>
+            <a:pPr marL="863599" lvl="1" indent="-431800" algn="l">
+              <a:lnSpc>
+                <a:spcPts val="5519"/>
+              </a:lnSpc>
+              <a:buFont typeface="Arial"/>
+              <a:buChar char="•"/>
+            </a:pPr>
+            <a:r>
+              <a:rPr lang="en-US" sz="3999" b="1" dirty="0">
+                <a:solidFill>
+                  <a:srgbClr val="FFFCF4"/>
+                </a:solidFill>
+                <a:latin typeface="Times New Roman MT Bold"/>
+                <a:ea typeface="Times New Roman MT Bold"/>
+                <a:cs typeface="Times New Roman MT Bold"/>
+                <a:sym typeface="Times New Roman MT Bold"/>
+              </a:rPr>
+              <a:t>AI</a:t>
+            </a:r>
+            <a:r>
+              <a:rPr lang="en-US" sz="3999" dirty="0">
                 <a:solidFill>
                   <a:srgbClr val="FFFCF4"/>
                 </a:solidFill>
@@ -9093,19 +10213,31 @@
                 <a:cs typeface="Times New Roman MT"/>
                 <a:sym typeface="Times New Roman MT"/>
               </a:rPr>
-              <a:t>Used to represent texts numerically based on word frequency.</a:t>
-            </a:r>
-          </a:p>
-          <a:p>
-            <a:pPr marL="746879" lvl="1" indent="-373440" algn="l">
+              <a:t>: 0.70–0.79 range.</a:t>
+            </a:r>
+          </a:p>
+          <a:p>
+            <a:pPr marL="863599" lvl="1" indent="-431800" algn="l">
               <a:lnSpc>
-                <a:spcPts val="4773"/>
+                <a:spcPts val="5519"/>
               </a:lnSpc>
               <a:buFont typeface="Arial"/>
               <a:buChar char="•"/>
             </a:pPr>
             <a:r>
-              <a:rPr lang="en-US" sz="3459">
+              <a:rPr lang="en-US" sz="3999" b="1" dirty="0">
+                <a:solidFill>
+                  <a:srgbClr val="FFFCF4"/>
+                </a:solidFill>
+                <a:latin typeface="Times New Roman MT Bold"/>
+                <a:ea typeface="Times New Roman MT Bold"/>
+                <a:cs typeface="Times New Roman MT Bold"/>
+                <a:sym typeface="Times New Roman MT Bold"/>
+              </a:rPr>
+              <a:t>Original</a:t>
+            </a:r>
+            <a:r>
+              <a:rPr lang="en-US" sz="3999" dirty="0">
                 <a:solidFill>
                   <a:srgbClr val="FFFCF4"/>
                 </a:solidFill>
@@ -9114,38 +10246,17 @@
                 <a:cs typeface="Times New Roman MT"/>
                 <a:sym typeface="Times New Roman MT"/>
               </a:rPr>
-              <a:t> Captures lexical patterns and stylistic differences—ideal for classical ML models.</a:t>
+              <a:t>: 0.798 (highest diversity).</a:t>
             </a:r>
           </a:p>
           <a:p>
             <a:pPr algn="l">
               <a:lnSpc>
-                <a:spcPts val="4911"/>
+                <a:spcPts val="5519"/>
               </a:lnSpc>
             </a:pPr>
             <a:r>
-              <a:rPr lang="en-US" sz="3559" b="1">
-                <a:solidFill>
-                  <a:srgbClr val="FFFCF4"/>
-                </a:solidFill>
-                <a:latin typeface="Times New Roman MT Bold"/>
-                <a:ea typeface="Times New Roman MT Bold"/>
-                <a:cs typeface="Times New Roman MT Bold"/>
-                <a:sym typeface="Times New Roman MT Bold"/>
-              </a:rPr>
-              <a:t>BERT Embeddings (Contextual Representation)</a:t>
-            </a:r>
-          </a:p>
-          <a:p>
-            <a:pPr marL="746879" lvl="1" indent="-373440" algn="l">
-              <a:lnSpc>
-                <a:spcPts val="4773"/>
-              </a:lnSpc>
-              <a:buFont typeface="Arial"/>
-              <a:buChar char="•"/>
-            </a:pPr>
-            <a:r>
-              <a:rPr lang="en-US" sz="3459">
+              <a:rPr lang="en-US" sz="3999" b="1" dirty="0">
                 <a:solidFill>
                   <a:srgbClr val="FFFCF4"/>
                 </a:solidFill>
@@ -9154,19 +10265,10 @@
                 <a:cs typeface="Times New Roman MT"/>
                 <a:sym typeface="Times New Roman MT"/>
               </a:rPr>
-              <a:t>Transforms text into dense vectors capturing meaning and context.</a:t>
-            </a:r>
-          </a:p>
-          <a:p>
-            <a:pPr marL="746879" lvl="1" indent="-373440" algn="l">
-              <a:lnSpc>
-                <a:spcPts val="4773"/>
-              </a:lnSpc>
-              <a:buFont typeface="Arial"/>
-              <a:buChar char="•"/>
-            </a:pPr>
-            <a:r>
-              <a:rPr lang="en-US" sz="3459" u="none" strike="noStrike">
+              <a:t>Insight: Human abstracts use a broader and more varied vocabulary</a:t>
+            </a:r>
+            <a:r>
+              <a:rPr lang="en-US" sz="3999" dirty="0">
                 <a:solidFill>
                   <a:srgbClr val="FFFCF4"/>
                 </a:solidFill>
@@ -9175,87 +10277,14 @@
                 <a:cs typeface="Times New Roman MT"/>
                 <a:sym typeface="Times New Roman MT"/>
               </a:rPr>
-              <a:t> Enables deep models to understand semantics beyond surface words.</a:t>
-            </a:r>
-          </a:p>
-          <a:p>
-            <a:pPr algn="l">
-              <a:lnSpc>
-                <a:spcPts val="4911"/>
-              </a:lnSpc>
-            </a:pPr>
-            <a:r>
-              <a:rPr lang="en-US" sz="3559" b="1" u="none" strike="noStrike">
-                <a:solidFill>
-                  <a:srgbClr val="FFFCF4"/>
-                </a:solidFill>
-                <a:latin typeface="Times New Roman MT Bold"/>
-                <a:ea typeface="Times New Roman MT Bold"/>
-                <a:cs typeface="Times New Roman MT Bold"/>
-                <a:sym typeface="Times New Roman MT Bold"/>
-              </a:rPr>
-              <a:t>Data Splitting </a:t>
-            </a:r>
-            <a:r>
-              <a:rPr lang="en-US" sz="3559" u="none" strike="noStrike">
-                <a:solidFill>
-                  <a:srgbClr val="FFFCF4"/>
-                </a:solidFill>
-                <a:latin typeface="Times New Roman MT"/>
-                <a:ea typeface="Times New Roman MT"/>
-                <a:cs typeface="Times New Roman MT"/>
-                <a:sym typeface="Times New Roman MT"/>
-              </a:rPr>
-              <a:t>(70 / 15 / 15 : Train / Validation / Test)</a:t>
-            </a:r>
-          </a:p>
-          <a:p>
-            <a:pPr marL="746879" lvl="1" indent="-373440" algn="l">
-              <a:lnSpc>
-                <a:spcPts val="4773"/>
-              </a:lnSpc>
-              <a:buFont typeface="Arial"/>
-              <a:buChar char="•"/>
-            </a:pPr>
-            <a:r>
-              <a:rPr lang="en-US" sz="3459" u="none" strike="noStrike">
-                <a:solidFill>
-                  <a:srgbClr val="FFFCF4"/>
-                </a:solidFill>
-                <a:latin typeface="Times New Roman MT"/>
-                <a:ea typeface="Times New Roman MT"/>
-                <a:cs typeface="Times New Roman MT"/>
-                <a:sym typeface="Times New Roman MT"/>
-              </a:rPr>
-              <a:t>Ensures fair model evaluation and prevents data leakage.</a:t>
-            </a:r>
-          </a:p>
-          <a:p>
-            <a:pPr marL="746879" lvl="1" indent="-373440" algn="l">
-              <a:lnSpc>
-                <a:spcPts val="4773"/>
-              </a:lnSpc>
-              <a:buFont typeface="Arial"/>
-              <a:buChar char="•"/>
-            </a:pPr>
-            <a:r>
-              <a:rPr lang="en-US" sz="3459" u="none" strike="noStrike">
-                <a:solidFill>
-                  <a:srgbClr val="FFFCF4"/>
-                </a:solidFill>
-                <a:latin typeface="Times New Roman MT"/>
-                <a:ea typeface="Times New Roman MT"/>
-                <a:cs typeface="Times New Roman MT"/>
-                <a:sym typeface="Times New Roman MT"/>
-              </a:rPr>
-              <a:t> Training used for fitting, validation for tuning, and test for final performance check.</a:t>
-            </a:r>
-          </a:p>
-        </p:txBody>
-      </p:sp>
-      <p:sp>
-        <p:nvSpPr>
-          <p:cNvPr id="11" name="AutoShape 11"/>
+              <a:t>.</a:t>
+            </a:r>
+          </a:p>
+        </p:txBody>
+      </p:sp>
+      <p:sp>
+        <p:nvSpPr>
+          <p:cNvPr id="9" name="AutoShape 9"/>
           <p:cNvSpPr/>
           <p:nvPr/>
         </p:nvSpPr>
@@ -9573,4 +10602,319 @@
   <a:objectDefaults/>
   <a:extraClrSchemeLst/>
 </a:theme>
+</file>
+
+<file path=ppt/theme/theme2.xml><?xml version="1.0" encoding="utf-8"?>
+<a:theme xmlns:a="http://schemas.openxmlformats.org/drawingml/2006/main" name="Office Theme">
+  <a:themeElements>
+    <a:clrScheme name="Office">
+      <a:dk1>
+        <a:sysClr val="windowText" lastClr="000000"/>
+      </a:dk1>
+      <a:lt1>
+        <a:sysClr val="window" lastClr="FFFFFF"/>
+      </a:lt1>
+      <a:dk2>
+        <a:srgbClr val="0E2841"/>
+      </a:dk2>
+      <a:lt2>
+        <a:srgbClr val="E8E8E8"/>
+      </a:lt2>
+      <a:accent1>
+        <a:srgbClr val="156082"/>
+      </a:accent1>
+      <a:accent2>
+        <a:srgbClr val="E97132"/>
+      </a:accent2>
+      <a:accent3>
+        <a:srgbClr val="196B24"/>
+      </a:accent3>
+      <a:accent4>
+        <a:srgbClr val="0F9ED5"/>
+      </a:accent4>
+      <a:accent5>
+        <a:srgbClr val="A02B93"/>
+      </a:accent5>
+      <a:accent6>
+        <a:srgbClr val="4EA72E"/>
+      </a:accent6>
+      <a:hlink>
+        <a:srgbClr val="467886"/>
+      </a:hlink>
+      <a:folHlink>
+        <a:srgbClr val="96607D"/>
+      </a:folHlink>
+    </a:clrScheme>
+    <a:fontScheme name="Office">
+      <a:majorFont>
+        <a:latin typeface="Aptos Display" panose="02110004020202020204"/>
+        <a:ea typeface=""/>
+        <a:cs typeface=""/>
+        <a:font script="Jpan" typeface="游ゴシック Light"/>
+        <a:font script="Hang" typeface="맑은 고딕"/>
+        <a:font script="Hans" typeface="等线 Light"/>
+        <a:font script="Hant" typeface="新細明體"/>
+        <a:font script="Arab" typeface="Times New Roman"/>
+        <a:font script="Hebr" typeface="Times New Roman"/>
+        <a:font script="Thai" typeface="Angsana New"/>
+        <a:font script="Ethi" typeface="Nyala"/>
+        <a:font script="Beng" typeface="Vrinda"/>
+        <a:font script="Gujr" typeface="Shruti"/>
+        <a:font script="Khmr" typeface="MoolBoran"/>
+        <a:font script="Knda" typeface="Tunga"/>
+        <a:font script="Guru" typeface="Raavi"/>
+        <a:font script="Cans" typeface="Euphemia"/>
+        <a:font script="Cher" typeface="Plantagenet Cherokee"/>
+        <a:font script="Yiii" typeface="Microsoft Yi Baiti"/>
+        <a:font script="Tibt" typeface="Microsoft Himalaya"/>
+        <a:font script="Thaa" typeface="MV Boli"/>
+        <a:font script="Deva" typeface="Mangal"/>
+        <a:font script="Telu" typeface="Gautami"/>
+        <a:font script="Taml" typeface="Latha"/>
+        <a:font script="Syrc" typeface="Estrangelo Edessa"/>
+        <a:font script="Orya" typeface="Kalinga"/>
+        <a:font script="Mlym" typeface="Kartika"/>
+        <a:font script="Laoo" typeface="DokChampa"/>
+        <a:font script="Sinh" typeface="Iskoola Pota"/>
+        <a:font script="Mong" typeface="Mongolian Baiti"/>
+        <a:font script="Viet" typeface="Times New Roman"/>
+        <a:font script="Uigh" typeface="Microsoft Uighur"/>
+        <a:font script="Geor" typeface="Sylfaen"/>
+        <a:font script="Armn" typeface="Arial"/>
+        <a:font script="Bugi" typeface="Leelawadee UI"/>
+        <a:font script="Bopo" typeface="Microsoft JhengHei"/>
+        <a:font script="Java" typeface="Javanese Text"/>
+        <a:font script="Lisu" typeface="Segoe UI"/>
+        <a:font script="Mymr" typeface="Myanmar Text"/>
+        <a:font script="Nkoo" typeface="Ebrima"/>
+        <a:font script="Olck" typeface="Nirmala UI"/>
+        <a:font script="Osma" typeface="Ebrima"/>
+        <a:font script="Phag" typeface="Phagspa"/>
+        <a:font script="Syrn" typeface="Estrangelo Edessa"/>
+        <a:font script="Syrj" typeface="Estrangelo Edessa"/>
+        <a:font script="Syre" typeface="Estrangelo Edessa"/>
+        <a:font script="Sora" typeface="Nirmala UI"/>
+        <a:font script="Tale" typeface="Microsoft Tai Le"/>
+        <a:font script="Talu" typeface="Microsoft New Tai Lue"/>
+        <a:font script="Tfng" typeface="Ebrima"/>
+      </a:majorFont>
+      <a:minorFont>
+        <a:latin typeface="Aptos" panose="02110004020202020204"/>
+        <a:ea typeface=""/>
+        <a:cs typeface=""/>
+        <a:font script="Jpan" typeface="游ゴシック"/>
+        <a:font script="Hang" typeface="맑은 고딕"/>
+        <a:font script="Hans" typeface="等线"/>
+        <a:font script="Hant" typeface="新細明體"/>
+        <a:font script="Arab" typeface="Arial"/>
+        <a:font script="Hebr" typeface="Arial"/>
+        <a:font script="Thai" typeface="Cordia New"/>
+        <a:font script="Ethi" typeface="Nyala"/>
+        <a:font script="Beng" typeface="Vrinda"/>
+        <a:font script="Gujr" typeface="Shruti"/>
+        <a:font script="Khmr" typeface="DaunPenh"/>
+        <a:font script="Knda" typeface="Tunga"/>
+        <a:font script="Guru" typeface="Raavi"/>
+        <a:font script="Cans" typeface="Euphemia"/>
+        <a:font script="Cher" typeface="Plantagenet Cherokee"/>
+        <a:font script="Yiii" typeface="Microsoft Yi Baiti"/>
+        <a:font script="Tibt" typeface="Microsoft Himalaya"/>
+        <a:font script="Thaa" typeface="MV Boli"/>
+        <a:font script="Deva" typeface="Mangal"/>
+        <a:font script="Telu" typeface="Gautami"/>
+        <a:font script="Taml" typeface="Latha"/>
+        <a:font script="Syrc" typeface="Estrangelo Edessa"/>
+        <a:font script="Orya" typeface="Kalinga"/>
+        <a:font script="Mlym" typeface="Kartika"/>
+        <a:font script="Laoo" typeface="DokChampa"/>
+        <a:font script="Sinh" typeface="Iskoola Pota"/>
+        <a:font script="Mong" typeface="Mongolian Baiti"/>
+        <a:font script="Viet" typeface="Arial"/>
+        <a:font script="Uigh" typeface="Microsoft Uighur"/>
+        <a:font script="Geor" typeface="Sylfaen"/>
+        <a:font script="Armn" typeface="Arial"/>
+        <a:font script="Bugi" typeface="Leelawadee UI"/>
+        <a:font script="Bopo" typeface="Microsoft JhengHei"/>
+        <a:font script="Java" typeface="Javanese Text"/>
+        <a:font script="Lisu" typeface="Segoe UI"/>
+        <a:font script="Mymr" typeface="Myanmar Text"/>
+        <a:font script="Nkoo" typeface="Ebrima"/>
+        <a:font script="Olck" typeface="Nirmala UI"/>
+        <a:font script="Osma" typeface="Ebrima"/>
+        <a:font script="Phag" typeface="Phagspa"/>
+        <a:font script="Syrn" typeface="Estrangelo Edessa"/>
+        <a:font script="Syrj" typeface="Estrangelo Edessa"/>
+        <a:font script="Syre" typeface="Estrangelo Edessa"/>
+        <a:font script="Sora" typeface="Nirmala UI"/>
+        <a:font script="Tale" typeface="Microsoft Tai Le"/>
+        <a:font script="Talu" typeface="Microsoft New Tai Lue"/>
+        <a:font script="Tfng" typeface="Ebrima"/>
+      </a:minorFont>
+    </a:fontScheme>
+    <a:fmtScheme name="Office">
+      <a:fillStyleLst>
+        <a:solidFill>
+          <a:schemeClr val="phClr"/>
+        </a:solidFill>
+        <a:gradFill rotWithShape="1">
+          <a:gsLst>
+            <a:gs pos="0">
+              <a:schemeClr val="phClr">
+                <a:lumMod val="110000"/>
+                <a:satMod val="105000"/>
+                <a:tint val="67000"/>
+              </a:schemeClr>
+            </a:gs>
+            <a:gs pos="50000">
+              <a:schemeClr val="phClr">
+                <a:lumMod val="105000"/>
+                <a:satMod val="103000"/>
+                <a:tint val="73000"/>
+              </a:schemeClr>
+            </a:gs>
+            <a:gs pos="100000">
+              <a:schemeClr val="phClr">
+                <a:lumMod val="105000"/>
+                <a:satMod val="109000"/>
+                <a:tint val="81000"/>
+              </a:schemeClr>
+            </a:gs>
+          </a:gsLst>
+          <a:lin ang="5400000" scaled="0"/>
+        </a:gradFill>
+        <a:gradFill rotWithShape="1">
+          <a:gsLst>
+            <a:gs pos="0">
+              <a:schemeClr val="phClr">
+                <a:satMod val="103000"/>
+                <a:lumMod val="102000"/>
+                <a:tint val="94000"/>
+              </a:schemeClr>
+            </a:gs>
+            <a:gs pos="50000">
+              <a:schemeClr val="phClr">
+                <a:satMod val="110000"/>
+                <a:lumMod val="100000"/>
+                <a:shade val="100000"/>
+              </a:schemeClr>
+            </a:gs>
+            <a:gs pos="100000">
+              <a:schemeClr val="phClr">
+                <a:lumMod val="99000"/>
+                <a:satMod val="120000"/>
+                <a:shade val="78000"/>
+              </a:schemeClr>
+            </a:gs>
+          </a:gsLst>
+          <a:lin ang="5400000" scaled="0"/>
+        </a:gradFill>
+      </a:fillStyleLst>
+      <a:lnStyleLst>
+        <a:ln w="12700" cap="flat" cmpd="sng" algn="ctr">
+          <a:solidFill>
+            <a:schemeClr val="phClr"/>
+          </a:solidFill>
+          <a:prstDash val="solid"/>
+          <a:miter lim="800000"/>
+        </a:ln>
+        <a:ln w="19050" cap="flat" cmpd="sng" algn="ctr">
+          <a:solidFill>
+            <a:schemeClr val="phClr"/>
+          </a:solidFill>
+          <a:prstDash val="solid"/>
+          <a:miter lim="800000"/>
+        </a:ln>
+        <a:ln w="25400" cap="flat" cmpd="sng" algn="ctr">
+          <a:solidFill>
+            <a:schemeClr val="phClr"/>
+          </a:solidFill>
+          <a:prstDash val="solid"/>
+          <a:miter lim="800000"/>
+        </a:ln>
+      </a:lnStyleLst>
+      <a:effectStyleLst>
+        <a:effectStyle>
+          <a:effectLst/>
+        </a:effectStyle>
+        <a:effectStyle>
+          <a:effectLst/>
+        </a:effectStyle>
+        <a:effectStyle>
+          <a:effectLst>
+            <a:outerShdw blurRad="57150" dist="19050" dir="5400000" algn="ctr" rotWithShape="0">
+              <a:srgbClr val="000000">
+                <a:alpha val="63000"/>
+              </a:srgbClr>
+            </a:outerShdw>
+          </a:effectLst>
+        </a:effectStyle>
+      </a:effectStyleLst>
+      <a:bgFillStyleLst>
+        <a:solidFill>
+          <a:schemeClr val="phClr"/>
+        </a:solidFill>
+        <a:solidFill>
+          <a:schemeClr val="phClr">
+            <a:tint val="95000"/>
+            <a:satMod val="170000"/>
+          </a:schemeClr>
+        </a:solidFill>
+        <a:gradFill rotWithShape="1">
+          <a:gsLst>
+            <a:gs pos="0">
+              <a:schemeClr val="phClr">
+                <a:tint val="93000"/>
+                <a:satMod val="150000"/>
+                <a:shade val="98000"/>
+                <a:lumMod val="102000"/>
+              </a:schemeClr>
+            </a:gs>
+            <a:gs pos="50000">
+              <a:schemeClr val="phClr">
+                <a:tint val="98000"/>
+                <a:satMod val="130000"/>
+                <a:shade val="90000"/>
+                <a:lumMod val="103000"/>
+              </a:schemeClr>
+            </a:gs>
+            <a:gs pos="100000">
+              <a:schemeClr val="phClr">
+                <a:shade val="63000"/>
+                <a:satMod val="120000"/>
+              </a:schemeClr>
+            </a:gs>
+          </a:gsLst>
+          <a:lin ang="5400000" scaled="0"/>
+        </a:gradFill>
+      </a:bgFillStyleLst>
+    </a:fmtScheme>
+  </a:themeElements>
+  <a:objectDefaults>
+    <a:lnDef>
+      <a:spPr/>
+      <a:bodyPr/>
+      <a:lstStyle/>
+      <a:style>
+        <a:lnRef idx="2">
+          <a:schemeClr val="accent1"/>
+        </a:lnRef>
+        <a:fillRef idx="0">
+          <a:schemeClr val="accent1"/>
+        </a:fillRef>
+        <a:effectRef idx="1">
+          <a:schemeClr val="accent1"/>
+        </a:effectRef>
+        <a:fontRef idx="minor">
+          <a:schemeClr val="tx1"/>
+        </a:fontRef>
+      </a:style>
+    </a:lnDef>
+  </a:objectDefaults>
+  <a:extraClrSchemeLst/>
+  <a:extLst>
+    <a:ext uri="{05A4C25C-085E-4340-85A3-A5531E510DB2}">
+      <thm15:themeFamily xmlns:thm15="http://schemas.microsoft.com/office/thememl/2012/main" name="Office Theme" id="{2E142A2C-CD16-42D6-873A-C26D2A0506FA}" vid="{1BDDFF52-6CD6-40A5-AB3C-68EB2F1E4D0A}"/>
+    </a:ext>
+  </a:extLst>
+</a:theme>
 </file>